--- a/public/Carta de Presentación.pptx
+++ b/public/Carta de Presentación.pptx
@@ -3335,7 +3335,7 @@
         </p:nvSpPr>
         <p:spPr>
           <a:xfrm>
-            <a:off x="838200" y="113121"/>
+            <a:off x="838200" y="113120"/>
             <a:ext cx="10515600" cy="6744880"/>
           </a:xfrm>
         </p:spPr>
@@ -3393,7 +3393,7 @@
             </a:pPr>
             <a:r>
               <a:rPr lang="es-MX" sz="1500" b="1" dirty="0"/>
-              <a:t>Estimado equipo de reclutamiento:</a:t>
+              <a:t>Estimado equipo de reclutamiento: </a:t>
             </a:r>
             <a:endParaRPr lang="es-MX" sz="1500" dirty="0"/>
           </a:p>
@@ -3494,32 +3494,29 @@
             <a:pPr>
               <a:buNone/>
             </a:pPr>
+            <a:endParaRPr lang="es-MX" sz="1500" dirty="0"/>
+          </a:p>
+          <a:p>
+            <a:pPr>
+              <a:buNone/>
+            </a:pPr>
+            <a:r>
+              <a:rPr lang="es-MX" sz="1500" dirty="0"/>
+              <a:t>Atentamente,</a:t>
+            </a:r>
+          </a:p>
+          <a:p>
+            <a:pPr>
+              <a:buNone/>
+            </a:pPr>
             <a:r>
               <a:rPr lang="es-MX" sz="1500" b="1" dirty="0"/>
-              <a:t>Atentamente,</a:t>
-            </a:r>
-          </a:p>
-          <a:p>
-            <a:pPr>
-              <a:buNone/>
-            </a:pPr>
-            <a:endParaRPr lang="es-MX" sz="1500" dirty="0"/>
-          </a:p>
-          <a:p>
-            <a:pPr>
-              <a:buNone/>
-            </a:pPr>
-            <a:endParaRPr lang="es-MX" sz="1500" dirty="0"/>
-          </a:p>
-          <a:p>
-            <a:pPr>
-              <a:buNone/>
-            </a:pPr>
-            <a:r>
-              <a:rPr lang="es-MX" sz="1500" b="1" dirty="0"/>
+              <a:t>		</a:t>
+            </a:r>
+            <a:r>
+              <a:rPr lang="es-MX" sz="1500" dirty="0"/>
               <a:t>Arturo Juárez Monroy</a:t>
             </a:r>
-            <a:endParaRPr lang="es-MX" sz="1500" dirty="0"/>
           </a:p>
           <a:p>
             <a:endParaRPr lang="es-MX" dirty="0"/>
@@ -3650,7 +3647,7 @@
         </p:blipFill>
         <p:spPr>
           <a:xfrm>
-            <a:off x="2925017" y="6117273"/>
+            <a:off x="3754576" y="6013579"/>
             <a:ext cx="1161800" cy="627606"/>
           </a:xfrm>
           <a:prstGeom prst="rect">

--- a/public/Carta de Presentación.pptx
+++ b/public/Carta de Presentación.pptx
@@ -275,7 +275,7 @@
           <a:p>
             <a:fld id="{4E370992-1CAB-4810-8415-DC9E05727B44}" type="datetimeFigureOut">
               <a:rPr lang="es-MX" smtClean="0"/>
-              <a:t>27/06/2026</a:t>
+              <a:t>28/06/2026</a:t>
             </a:fld>
             <a:endParaRPr lang="es-MX"/>
           </a:p>
@@ -445,7 +445,7 @@
           <a:p>
             <a:fld id="{4E370992-1CAB-4810-8415-DC9E05727B44}" type="datetimeFigureOut">
               <a:rPr lang="es-MX" smtClean="0"/>
-              <a:t>27/06/2026</a:t>
+              <a:t>28/06/2026</a:t>
             </a:fld>
             <a:endParaRPr lang="es-MX"/>
           </a:p>
@@ -625,7 +625,7 @@
           <a:p>
             <a:fld id="{4E370992-1CAB-4810-8415-DC9E05727B44}" type="datetimeFigureOut">
               <a:rPr lang="es-MX" smtClean="0"/>
-              <a:t>27/06/2026</a:t>
+              <a:t>28/06/2026</a:t>
             </a:fld>
             <a:endParaRPr lang="es-MX"/>
           </a:p>
@@ -795,7 +795,7 @@
           <a:p>
             <a:fld id="{4E370992-1CAB-4810-8415-DC9E05727B44}" type="datetimeFigureOut">
               <a:rPr lang="es-MX" smtClean="0"/>
-              <a:t>27/06/2026</a:t>
+              <a:t>28/06/2026</a:t>
             </a:fld>
             <a:endParaRPr lang="es-MX"/>
           </a:p>
@@ -1063,7 +1063,7 @@
           <a:p>
             <a:fld id="{4E370992-1CAB-4810-8415-DC9E05727B44}" type="datetimeFigureOut">
               <a:rPr lang="es-MX" smtClean="0"/>
-              <a:t>27/06/2026</a:t>
+              <a:t>28/06/2026</a:t>
             </a:fld>
             <a:endParaRPr lang="es-MX"/>
           </a:p>
@@ -1295,7 +1295,7 @@
           <a:p>
             <a:fld id="{4E370992-1CAB-4810-8415-DC9E05727B44}" type="datetimeFigureOut">
               <a:rPr lang="es-MX" smtClean="0"/>
-              <a:t>27/06/2026</a:t>
+              <a:t>28/06/2026</a:t>
             </a:fld>
             <a:endParaRPr lang="es-MX"/>
           </a:p>
@@ -1650,7 +1650,7 @@
           <a:p>
             <a:fld id="{4E370992-1CAB-4810-8415-DC9E05727B44}" type="datetimeFigureOut">
               <a:rPr lang="es-MX" smtClean="0"/>
-              <a:t>27/06/2026</a:t>
+              <a:t>28/06/2026</a:t>
             </a:fld>
             <a:endParaRPr lang="es-MX"/>
           </a:p>
@@ -1791,7 +1791,7 @@
           <a:p>
             <a:fld id="{4E370992-1CAB-4810-8415-DC9E05727B44}" type="datetimeFigureOut">
               <a:rPr lang="es-MX" smtClean="0"/>
-              <a:t>27/06/2026</a:t>
+              <a:t>28/06/2026</a:t>
             </a:fld>
             <a:endParaRPr lang="es-MX"/>
           </a:p>
@@ -1886,7 +1886,7 @@
           <a:p>
             <a:fld id="{4E370992-1CAB-4810-8415-DC9E05727B44}" type="datetimeFigureOut">
               <a:rPr lang="es-MX" smtClean="0"/>
-              <a:t>27/06/2026</a:t>
+              <a:t>28/06/2026</a:t>
             </a:fld>
             <a:endParaRPr lang="es-MX"/>
           </a:p>
@@ -2248,7 +2248,7 @@
           <a:p>
             <a:fld id="{4E370992-1CAB-4810-8415-DC9E05727B44}" type="datetimeFigureOut">
               <a:rPr lang="es-MX" smtClean="0"/>
-              <a:t>27/06/2026</a:t>
+              <a:t>28/06/2026</a:t>
             </a:fld>
             <a:endParaRPr lang="es-MX"/>
           </a:p>
@@ -2610,7 +2610,7 @@
           <a:p>
             <a:fld id="{4E370992-1CAB-4810-8415-DC9E05727B44}" type="datetimeFigureOut">
               <a:rPr lang="es-MX" smtClean="0"/>
-              <a:t>27/06/2026</a:t>
+              <a:t>28/06/2026</a:t>
             </a:fld>
             <a:endParaRPr lang="es-MX"/>
           </a:p>
@@ -2854,7 +2854,7 @@
           <a:p>
             <a:fld id="{4E370992-1CAB-4810-8415-DC9E05727B44}" type="datetimeFigureOut">
               <a:rPr lang="es-MX" smtClean="0"/>
-              <a:t>27/06/2026</a:t>
+              <a:t>28/06/2026</a:t>
             </a:fld>
             <a:endParaRPr lang="es-MX"/>
           </a:p>
@@ -3359,7 +3359,7 @@
             </a:pPr>
             <a:r>
               <a:rPr lang="es-MX" sz="1200" dirty="0"/>
-              <a:t>05 Abril, 2026</a:t>
+              <a:t>03 Abril, 2026</a:t>
             </a:r>
             <a:endParaRPr lang="es-MX" sz="1100" dirty="0"/>
           </a:p>
@@ -3403,7 +3403,7 @@
             </a:pPr>
             <a:r>
               <a:rPr lang="es-MX" sz="1500" dirty="0"/>
-              <a:t>Soy Ingeniero en Software con experiencia en el desarrollo de aplicaciones web de principio a fin, con un enfoque en el desarrollo </a:t>
+              <a:t>Soy ingeniero de software con experiencia en el desarrollo integral de aplicaciones web, especializado en </a:t>
             </a:r>
             <a:r>
               <a:rPr lang="es-MX" sz="1500" dirty="0" err="1"/>
@@ -3411,15 +3411,23 @@
             </a:r>
             <a:r>
               <a:rPr lang="es-MX" sz="1500" dirty="0"/>
-              <a:t> utilizando Java, Spring Boot y bases de datos SQL. He trabajado en el desarrollo de </a:t>
+              <a:t> con Java, Spring Boot y bases de datos SQL. Mi experiencia incluye el desarrollo de API REST, implementación de lógica de negocio, integración con bases de datos, creación de paneles de administración y trabajo con arquitecturas en capas y el patrón MVC. Asimismo, participo en el desarrollo </a:t>
             </a:r>
             <a:r>
               <a:rPr lang="es-MX" sz="1500" dirty="0" err="1"/>
-              <a:t>APIs</a:t>
+              <a:t>frontend</a:t>
             </a:r>
             <a:r>
               <a:rPr lang="es-MX" sz="1500" dirty="0"/>
-              <a:t> REST, lógica de negocio, integración con bases de datos y paneles administrativos, además de participar en el desarrollo de interfaces cuando el proyecto lo requiere.</a:t>
+              <a:t> utilizando </a:t>
+            </a:r>
+            <a:r>
+              <a:rPr lang="es-MX" sz="1500" dirty="0" err="1"/>
+              <a:t>React</a:t>
+            </a:r>
+            <a:r>
+              <a:rPr lang="es-MX" sz="1500" dirty="0"/>
+              <a:t>, Angular y Tailwind cuando las necesidades del proyecto lo requieren.</a:t>
             </a:r>
           </a:p>
           <a:p>
@@ -3428,32 +3436,16 @@
             </a:pPr>
             <a:r>
               <a:rPr lang="es-MX" sz="1500" dirty="0"/>
-              <a:t>He participado en proyectos del sector público, privado y financiero. En mi experiencia más reciente colaboré en un entorno financiero desarrollando servicios </a:t>
-            </a:r>
-            <a:r>
-              <a:rPr lang="es-MX" sz="1500" dirty="0" err="1"/>
-              <a:t>backend</a:t>
-            </a:r>
+              <a:t>He colaborado en proyectos de los sectores público, privado y financiero, aplicando buenas prácticas de desarrollo y utilizando Git para el control de versiones y la gestión colaborativa del código.</a:t>
+            </a:r>
+          </a:p>
+          <a:p>
+            <a:pPr>
+              <a:buNone/>
+            </a:pPr>
             <a:r>
               <a:rPr lang="es-MX" sz="1500" dirty="0"/>
-              <a:t> con Java, Spring Boot, </a:t>
-            </a:r>
-            <a:r>
-              <a:rPr lang="es-MX" sz="1500" dirty="0" err="1"/>
-              <a:t>Hibernate</a:t>
-            </a:r>
-            <a:r>
-              <a:rPr lang="es-MX" sz="1500" dirty="0"/>
-              <a:t>, Oracle y PL/SQL, siguiendo una arquitectura por capas y metodologías Scrum. También estoy familiarizado con el uso de Git como herramienta de control de versiones.</a:t>
-            </a:r>
-          </a:p>
-          <a:p>
-            <a:pPr>
-              <a:buNone/>
-            </a:pPr>
-            <a:r>
-              <a:rPr lang="es-MX" sz="1500" dirty="0"/>
-              <a:t>Además, desarrollo proyectos personales para seguir aprendiendo nuevas tecnologías y fortalecer mis habilidades en desarrollo de software, arquitectura de aplicaciones y resolución de problemas, como Starlight: No </a:t>
+              <a:t>De forma paralela, desarrollo proyectos personales con el objetivo de seguir aprendiendo nuevas tecnologías y fortalecer mis conocimientos en desarrollo de software, arquitectura de aplicaciones y resolución de problemas. Entre ellos destaca *Starlight: No </a:t>
             </a:r>
             <a:r>
               <a:rPr lang="es-MX" sz="1500" dirty="0" err="1"/>
@@ -3461,7 +3453,7 @@
             </a:r>
             <a:r>
               <a:rPr lang="es-MX" sz="1500" dirty="0"/>
-              <a:t>, un videojuego arcade para navegador desarrollado con JavaScript ES6, </a:t>
+              <a:t>*, un videojuego arcade para navegador desarrollado con JavaScript ES6, </a:t>
             </a:r>
             <a:r>
               <a:rPr lang="es-MX" sz="1500" dirty="0" err="1"/>
@@ -3478,7 +3470,7 @@
             </a:pPr>
             <a:r>
               <a:rPr lang="es-MX" sz="1500" dirty="0"/>
-              <a:t>Me considero una persona responsable, adaptable y orientada al aprendizaje continuo. Disfruto desarrollar soluciones con código mantenible, una arquitectura sólida y un enfoque en la calidad del software.</a:t>
+              <a:t>Me considero una persona responsable, adaptable y comprometida con el aprendizaje continuo. Disfruto diseñar y desarrollar soluciones con código mantenible, una arquitectura sólida y un enfoque constante en la calidad del software.</a:t>
             </a:r>
           </a:p>
           <a:p>
@@ -3487,7 +3479,7 @@
             </a:pPr>
             <a:r>
               <a:rPr lang="es-MX" sz="1500" dirty="0"/>
-              <a:t>Agradezco el tiempo dedicado a revisar mi perfil y quedo a su disposición para conversar sobre cómo puedo contribuir a los objetivos de su organización.</a:t>
+              <a:t>Agradezco el tiempo dedicado a revisar mi perfil y quedo a su disposición para conversar sobre cómo puedo contribuir al cumplimiento de los objetivos de su organización.</a:t>
             </a:r>
           </a:p>
           <a:p>
@@ -3598,61 +3590,6 @@
               <a:srgbClr val="FFFFFF"/>
             </a:contourClr>
           </a:sp3d>
-        </p:spPr>
-      </p:pic>
-      <p:pic>
-        <p:nvPicPr>
-          <p:cNvPr id="11" name="Imagen 10">
-            <a:extLst>
-              <a:ext uri="{FF2B5EF4-FFF2-40B4-BE49-F238E27FC236}">
-                <a16:creationId xmlns:a16="http://schemas.microsoft.com/office/drawing/2014/main" id="{213084D1-9E76-7171-DB75-062BC9AC3583}"/>
-              </a:ext>
-            </a:extLst>
-          </p:cNvPr>
-          <p:cNvPicPr>
-            <a:picLocks noChangeAspect="1"/>
-          </p:cNvPicPr>
-          <p:nvPr/>
-        </p:nvPicPr>
-        <p:blipFill>
-          <a:blip r:embed="rId4">
-            <a:duotone>
-              <a:schemeClr val="bg2">
-                <a:shade val="45000"/>
-                <a:satMod val="135000"/>
-              </a:schemeClr>
-              <a:prstClr val="white"/>
-            </a:duotone>
-            <a:extLst>
-              <a:ext uri="{BEBA8EAE-BF5A-486C-A8C5-ECC9F3942E4B}">
-                <a14:imgProps xmlns:a14="http://schemas.microsoft.com/office/drawing/2010/main">
-                  <a14:imgLayer r:embed="rId5">
-                    <a14:imgEffect>
-                      <a14:artisticPhotocopy/>
-                    </a14:imgEffect>
-                    <a14:imgEffect>
-                      <a14:brightnessContrast contrast="-20000"/>
-                    </a14:imgEffect>
-                  </a14:imgLayer>
-                </a14:imgProps>
-              </a:ext>
-              <a:ext uri="{28A0092B-C50C-407E-A947-70E740481C1C}">
-                <a14:useLocalDpi xmlns:a14="http://schemas.microsoft.com/office/drawing/2010/main" val="0"/>
-              </a:ext>
-            </a:extLst>
-          </a:blip>
-          <a:stretch>
-            <a:fillRect/>
-          </a:stretch>
-        </p:blipFill>
-        <p:spPr>
-          <a:xfrm>
-            <a:off x="3754576" y="6013579"/>
-            <a:ext cx="1161800" cy="627606"/>
-          </a:xfrm>
-          <a:prstGeom prst="rect">
-            <a:avLst/>
-          </a:prstGeom>
         </p:spPr>
       </p:pic>
     </p:spTree>

--- a/public/Carta de Presentación.pptx
+++ b/public/Carta de Presentación.pptx
@@ -3297,9 +3297,15 @@
   <p:cSld>
     <p:bg>
       <p:bgPr>
-        <a:solidFill>
-          <a:schemeClr val="bg2"/>
-        </a:solidFill>
+        <a:blipFill dpi="0" rotWithShape="1">
+          <a:blip r:embed="rId2">
+            <a:lum/>
+          </a:blip>
+          <a:srcRect/>
+          <a:stretch>
+            <a:fillRect/>
+          </a:stretch>
+        </a:blipFill>
         <a:effectLst/>
       </p:bgPr>
     </p:bg>
@@ -3335,13 +3341,13 @@
         </p:nvSpPr>
         <p:spPr>
           <a:xfrm>
-            <a:off x="838200" y="113120"/>
-            <a:ext cx="10515600" cy="6744880"/>
+            <a:off x="820133" y="1"/>
+            <a:ext cx="10708848" cy="7001300"/>
           </a:xfrm>
         </p:spPr>
         <p:txBody>
           <a:bodyPr>
-            <a:normAutofit fontScale="92500" lnSpcReduction="10000"/>
+            <a:normAutofit lnSpcReduction="10000"/>
           </a:bodyPr>
           <a:lstStyle/>
           <a:p>
@@ -3349,7 +3355,9 @@
               <a:buNone/>
             </a:pPr>
             <a:r>
-              <a:rPr lang="es-MX" sz="1200" dirty="0"/>
+              <a:rPr lang="es-MX" sz="1200" dirty="0">
+                <a:latin typeface="Sitka Small" pitchFamily="2" charset="0"/>
+              </a:rPr>
               <a:t>Pachuca de Soto, Hidalgo, México </a:t>
             </a:r>
           </a:p>
@@ -3358,17 +3366,23 @@
               <a:buNone/>
             </a:pPr>
             <a:r>
-              <a:rPr lang="es-MX" sz="1200" dirty="0"/>
+              <a:rPr lang="es-MX" sz="1200" dirty="0">
+                <a:latin typeface="Sitka Small" pitchFamily="2" charset="0"/>
+              </a:rPr>
               <a:t>03 Abril, 2026</a:t>
             </a:r>
-            <a:endParaRPr lang="es-MX" sz="1100" dirty="0"/>
+            <a:endParaRPr lang="es-MX" sz="1100" dirty="0">
+              <a:latin typeface="Sitka Small" pitchFamily="2" charset="0"/>
+            </a:endParaRPr>
           </a:p>
           <a:p>
             <a:pPr algn="ctr">
               <a:buNone/>
             </a:pPr>
             <a:r>
-              <a:rPr lang="es-MX" sz="1500" b="1" dirty="0"/>
+              <a:rPr lang="es-MX" sz="1500" b="1" dirty="0">
+                <a:latin typeface="Sitka Small" pitchFamily="2" charset="0"/>
+              </a:rPr>
               <a:t>CARTA DE PRESENTACIÓN</a:t>
             </a:r>
           </a:p>
@@ -3377,7 +3391,9 @@
               <a:buNone/>
             </a:pPr>
             <a:r>
-              <a:rPr lang="es-MX" sz="1500" b="1" dirty="0"/>
+              <a:rPr lang="es-MX" sz="1500" b="1" dirty="0">
+                <a:latin typeface="Sitka Small" pitchFamily="2" charset="0"/>
+              </a:rPr>
               <a:t>Departamento de Recursos Humanos</a:t>
             </a:r>
           </a:p>
@@ -3385,49 +3401,69 @@
             <a:pPr algn="ctr">
               <a:buNone/>
             </a:pPr>
-            <a:endParaRPr lang="es-MX" sz="1500" dirty="0"/>
+            <a:endParaRPr lang="es-MX" sz="1500" dirty="0">
+              <a:latin typeface="Sitka Small" pitchFamily="2" charset="0"/>
+            </a:endParaRPr>
           </a:p>
           <a:p>
             <a:pPr>
               <a:buNone/>
             </a:pPr>
             <a:r>
-              <a:rPr lang="es-MX" sz="1500" b="1" dirty="0"/>
+              <a:rPr lang="es-MX" sz="1500" b="1" dirty="0">
+                <a:latin typeface="Sitka Small" pitchFamily="2" charset="0"/>
+              </a:rPr>
               <a:t>Estimado equipo de reclutamiento: </a:t>
             </a:r>
-            <a:endParaRPr lang="es-MX" sz="1500" dirty="0"/>
+            <a:endParaRPr lang="es-MX" sz="1500" dirty="0">
+              <a:latin typeface="Sitka Small" pitchFamily="2" charset="0"/>
+            </a:endParaRPr>
           </a:p>
           <a:p>
             <a:pPr>
               <a:buNone/>
             </a:pPr>
             <a:r>
-              <a:rPr lang="es-MX" sz="1500" dirty="0"/>
-              <a:t>Soy ingeniero de software con experiencia en el desarrollo integral de aplicaciones web, especializado en </a:t>
-            </a:r>
-            <a:r>
-              <a:rPr lang="es-MX" sz="1500" dirty="0" err="1"/>
+              <a:rPr lang="es-MX" sz="1500" dirty="0">
+                <a:latin typeface="Sitka Small" pitchFamily="2" charset="0"/>
+              </a:rPr>
+              <a:t>Soy ingeniero de software con experiencia en el desarrollo integral de aplicaciones web, específicamente en el desarrollo </a:t>
+            </a:r>
+            <a:r>
+              <a:rPr lang="es-MX" sz="1500" dirty="0" err="1">
+                <a:latin typeface="Sitka Small" pitchFamily="2" charset="0"/>
+              </a:rPr>
               <a:t>backend</a:t>
             </a:r>
             <a:r>
-              <a:rPr lang="es-MX" sz="1500" dirty="0"/>
-              <a:t> con Java, Spring Boot y bases de datos SQL. Mi experiencia incluye el desarrollo de API REST, implementación de lógica de negocio, integración con bases de datos, creación de paneles de administración y trabajo con arquitecturas en capas y el patrón MVC. Asimismo, participo en el desarrollo </a:t>
-            </a:r>
-            <a:r>
-              <a:rPr lang="es-MX" sz="1500" dirty="0" err="1"/>
+              <a:rPr lang="es-MX" sz="1500" dirty="0">
+                <a:latin typeface="Sitka Small" pitchFamily="2" charset="0"/>
+              </a:rPr>
+              <a:t> utilizando Java, Spring Boot y SQL. Mi experiencia abarca el desarrollo de API REST, la implementación de lógica de negocio, la integración de bases de datos, la creación de paneles de administración y el trabajo con arquitecturas en capas y el patrón MVC. También disfruto realizar desarrollo </a:t>
+            </a:r>
+            <a:r>
+              <a:rPr lang="es-MX" sz="1500" dirty="0" err="1">
+                <a:latin typeface="Sitka Small" pitchFamily="2" charset="0"/>
+              </a:rPr>
               <a:t>frontend</a:t>
             </a:r>
             <a:r>
-              <a:rPr lang="es-MX" sz="1500" dirty="0"/>
-              <a:t> utilizando </a:t>
-            </a:r>
-            <a:r>
-              <a:rPr lang="es-MX" sz="1500" dirty="0" err="1"/>
+              <a:rPr lang="es-MX" sz="1500" dirty="0">
+                <a:latin typeface="Sitka Small" pitchFamily="2" charset="0"/>
+              </a:rPr>
+              <a:t> con </a:t>
+            </a:r>
+            <a:r>
+              <a:rPr lang="es-MX" sz="1500" dirty="0" err="1">
+                <a:latin typeface="Sitka Small" pitchFamily="2" charset="0"/>
+              </a:rPr>
               <a:t>React</a:t>
             </a:r>
             <a:r>
-              <a:rPr lang="es-MX" sz="1500" dirty="0"/>
-              <a:t>, Angular y Tailwind cuando las necesidades del proyecto lo requieren.</a:t>
+              <a:rPr lang="es-MX" sz="1500" dirty="0">
+                <a:latin typeface="Sitka Small" pitchFamily="2" charset="0"/>
+              </a:rPr>
+              <a:t>, Angular y Tailwind. </a:t>
             </a:r>
           </a:p>
           <a:p>
@@ -3435,8 +3471,10 @@
               <a:buNone/>
             </a:pPr>
             <a:r>
-              <a:rPr lang="es-MX" sz="1500" dirty="0"/>
-              <a:t>He colaborado en proyectos de los sectores público, privado y financiero, aplicando buenas prácticas de desarrollo y utilizando Git para el control de versiones y la gestión colaborativa del código.</a:t>
+              <a:rPr lang="es-MX" sz="1500" dirty="0">
+                <a:latin typeface="Sitka Small" pitchFamily="2" charset="0"/>
+              </a:rPr>
+              <a:t>He colaborado en proyectos de sectores público, privado y financiero, aplicando buenas prácticas de desarrollo y utilizando Git para el control de versiones y la gestión colaborativa del código.</a:t>
             </a:r>
           </a:p>
           <a:p>
@@ -3444,23 +3482,33 @@
               <a:buNone/>
             </a:pPr>
             <a:r>
-              <a:rPr lang="es-MX" sz="1500" dirty="0"/>
-              <a:t>De forma paralela, desarrollo proyectos personales con el objetivo de seguir aprendiendo nuevas tecnologías y fortalecer mis conocimientos en desarrollo de software, arquitectura de aplicaciones y resolución de problemas. Entre ellos destaca *Starlight: No </a:t>
-            </a:r>
-            <a:r>
-              <a:rPr lang="es-MX" sz="1500" dirty="0" err="1"/>
+              <a:rPr lang="es-MX" sz="1500" dirty="0">
+                <a:latin typeface="Sitka Small" pitchFamily="2" charset="0"/>
+              </a:rPr>
+              <a:t>De forma paralela, desarrollo proyectos personales con el objetivo de seguir aprendiendo nuevas tecnologías y fortalecer mis conocimientos en desarrollo de software, arquitectura de aplicaciones y resolución de problemas. Entre ellos destaca “Starlight: No </a:t>
+            </a:r>
+            <a:r>
+              <a:rPr lang="es-MX" sz="1500" dirty="0" err="1">
+                <a:latin typeface="Sitka Small" pitchFamily="2" charset="0"/>
+              </a:rPr>
               <a:t>Return</a:t>
             </a:r>
             <a:r>
-              <a:rPr lang="es-MX" sz="1500" dirty="0"/>
-              <a:t>*, un videojuego arcade para navegador desarrollado con JavaScript ES6, </a:t>
-            </a:r>
-            <a:r>
-              <a:rPr lang="es-MX" sz="1500" dirty="0" err="1"/>
+              <a:rPr lang="es-MX" sz="1500" dirty="0">
+                <a:latin typeface="Sitka Small" pitchFamily="2" charset="0"/>
+              </a:rPr>
+              <a:t>”, un videojuego arcade para navegador desarrollado con JavaScript ES6, </a:t>
+            </a:r>
+            <a:r>
+              <a:rPr lang="es-MX" sz="1500" dirty="0" err="1">
+                <a:latin typeface="Sitka Small" pitchFamily="2" charset="0"/>
+              </a:rPr>
               <a:t>Canvas</a:t>
             </a:r>
             <a:r>
-              <a:rPr lang="es-MX" sz="1500" dirty="0"/>
+              <a:rPr lang="es-MX" sz="1500" dirty="0">
+                <a:latin typeface="Sitka Small" pitchFamily="2" charset="0"/>
+              </a:rPr>
               <a:t> 2D, CSS3 y Web Audio API.</a:t>
             </a:r>
           </a:p>
@@ -3469,8 +3517,10 @@
               <a:buNone/>
             </a:pPr>
             <a:r>
-              <a:rPr lang="es-MX" sz="1500" dirty="0"/>
-              <a:t>Me considero una persona responsable, adaptable y comprometida con el aprendizaje continuo. Disfruto diseñar y desarrollar soluciones con código mantenible, una arquitectura sólida y un enfoque constante en la calidad del software.</a:t>
+              <a:rPr lang="es-MX" sz="1500" dirty="0">
+                <a:latin typeface="Sitka Small" pitchFamily="2" charset="0"/>
+              </a:rPr>
+              <a:t>Me considero una persona responsable, creativa y comprometida con el aprendizaje continuo. Disfruto diseñar y desarrollar soluciones con código mantenible, una arquitectura sólida y un enfoque constante en la calidad del software.</a:t>
             </a:r>
           </a:p>
           <a:p>
@@ -3478,7 +3528,9 @@
               <a:buNone/>
             </a:pPr>
             <a:r>
-              <a:rPr lang="es-MX" sz="1500" dirty="0"/>
+              <a:rPr lang="es-MX" sz="1500" dirty="0">
+                <a:latin typeface="Sitka Small" pitchFamily="2" charset="0"/>
+              </a:rPr>
               <a:t>Agradezco el tiempo dedicado a revisar mi perfil y quedo a su disposición para conversar sobre cómo puedo contribuir al cumplimiento de los objetivos de su organización.</a:t>
             </a:r>
           </a:p>
@@ -3486,14 +3538,18 @@
             <a:pPr>
               <a:buNone/>
             </a:pPr>
-            <a:endParaRPr lang="es-MX" sz="1500" dirty="0"/>
+            <a:endParaRPr lang="es-MX" sz="1500" dirty="0">
+              <a:latin typeface="Sitka Small" pitchFamily="2" charset="0"/>
+            </a:endParaRPr>
           </a:p>
           <a:p>
             <a:pPr>
               <a:buNone/>
             </a:pPr>
             <a:r>
-              <a:rPr lang="es-MX" sz="1500" dirty="0"/>
+              <a:rPr lang="es-MX" sz="1500" dirty="0">
+                <a:latin typeface="Sitka Small" pitchFamily="2" charset="0"/>
+              </a:rPr>
               <a:t>Atentamente,</a:t>
             </a:r>
           </a:p>
@@ -3502,11 +3558,15 @@
               <a:buNone/>
             </a:pPr>
             <a:r>
-              <a:rPr lang="es-MX" sz="1500" b="1" dirty="0"/>
+              <a:rPr lang="es-MX" sz="1500" b="1" dirty="0">
+                <a:latin typeface="Sitka Small" pitchFamily="2" charset="0"/>
+              </a:rPr>
               <a:t>		</a:t>
             </a:r>
             <a:r>
-              <a:rPr lang="es-MX" sz="1500" dirty="0"/>
+              <a:rPr lang="es-MX" sz="1500" dirty="0">
+                <a:latin typeface="Sitka Small" pitchFamily="2" charset="0"/>
+              </a:rPr>
               <a:t>Arturo Juárez Monroy</a:t>
             </a:r>
           </a:p>
@@ -3530,7 +3590,7 @@
           <p:nvPr/>
         </p:nvPicPr>
         <p:blipFill>
-          <a:blip r:embed="rId2">
+          <a:blip r:embed="rId3">
             <a:duotone>
               <a:schemeClr val="bg2">
                 <a:shade val="45000"/>
@@ -3541,9 +3601,12 @@
             <a:extLst>
               <a:ext uri="{BEBA8EAE-BF5A-486C-A8C5-ECC9F3942E4B}">
                 <a14:imgProps xmlns:a14="http://schemas.microsoft.com/office/drawing/2010/main">
-                  <a14:imgLayer r:embed="rId3">
+                  <a14:imgLayer r:embed="rId4">
                     <a14:imgEffect>
-                      <a14:brightnessContrast contrast="20000"/>
+                      <a14:sharpenSoften amount="50000"/>
+                    </a14:imgEffect>
+                    <a14:imgEffect>
+                      <a14:brightnessContrast contrast="40000"/>
                     </a14:imgEffect>
                   </a14:imgLayer>
                 </a14:imgProps>
@@ -3553,21 +3616,24 @@
               </a:ext>
             </a:extLst>
           </a:blip>
-          <a:srcRect t="16168" b="7088"/>
+          <a:srcRect t="16168" b="11138"/>
           <a:stretch>
             <a:fillRect/>
           </a:stretch>
         </p:blipFill>
         <p:spPr>
           <a:xfrm>
-            <a:off x="9643621" y="226243"/>
-            <a:ext cx="1395168" cy="1538904"/>
+            <a:off x="9657421" y="179107"/>
+            <a:ext cx="1548000" cy="1617379"/>
           </a:xfrm>
           <a:prstGeom prst="ellipse">
             <a:avLst/>
           </a:prstGeom>
-          <a:ln>
-            <a:noFill/>
+          <a:noFill/>
+          <a:ln w="12700">
+            <a:solidFill>
+              <a:srgbClr val="20625F"/>
+            </a:solidFill>
           </a:ln>
           <a:effectLst>
             <a:outerShdw blurRad="76200" dir="18900000" sy="23000" kx="-1200000" algn="bl" rotWithShape="0">
@@ -3576,20 +3642,6 @@
               </a:prstClr>
             </a:outerShdw>
           </a:effectLst>
-          <a:scene3d>
-            <a:camera prst="orthographicFront">
-              <a:rot lat="0" lon="0" rev="0"/>
-            </a:camera>
-            <a:lightRig rig="soft" dir="t">
-              <a:rot lat="0" lon="0" rev="0"/>
-            </a:lightRig>
-          </a:scene3d>
-          <a:sp3d contourW="44450" prstMaterial="matte">
-            <a:bevelT w="63500" h="63500" prst="artDeco"/>
-            <a:contourClr>
-              <a:srgbClr val="FFFFFF"/>
-            </a:contourClr>
-          </a:sp3d>
         </p:spPr>
       </p:pic>
     </p:spTree>
@@ -3608,7 +3660,7 @@
 <file path=ppt/theme/theme1.xml><?xml version="1.0" encoding="utf-8"?>
 <a:theme xmlns:a="http://schemas.openxmlformats.org/drawingml/2006/main" name="Paquete">
   <a:themeElements>
-    <a:clrScheme name="Azul II">
+    <a:clrScheme name="Personalizado 1">
       <a:dk1>
         <a:sysClr val="windowText" lastClr="000000"/>
       </a:dk1>
@@ -3616,34 +3668,34 @@
         <a:sysClr val="window" lastClr="FFFFFF"/>
       </a:lt1>
       <a:dk2>
-        <a:srgbClr val="335B74"/>
+        <a:srgbClr val="455F51"/>
       </a:dk2>
       <a:lt2>
-        <a:srgbClr val="DFE3E5"/>
+        <a:srgbClr val="E3DED1"/>
       </a:lt2>
       <a:accent1>
-        <a:srgbClr val="1CADE4"/>
+        <a:srgbClr val="3E9A68"/>
       </a:accent1>
       <a:accent2>
-        <a:srgbClr val="2683C6"/>
+        <a:srgbClr val="3E9A68"/>
       </a:accent2>
       <a:accent3>
-        <a:srgbClr val="27CED7"/>
+        <a:srgbClr val="C0CF3A"/>
       </a:accent3>
       <a:accent4>
-        <a:srgbClr val="42BA97"/>
+        <a:srgbClr val="029676"/>
       </a:accent4>
       <a:accent5>
-        <a:srgbClr val="3E8853"/>
+        <a:srgbClr val="4AB5C4"/>
       </a:accent5>
       <a:accent6>
-        <a:srgbClr val="62A39F"/>
+        <a:srgbClr val="0989B1"/>
       </a:accent6>
       <a:hlink>
-        <a:srgbClr val="6EAC1C"/>
+        <a:srgbClr val="3E9A68"/>
       </a:hlink>
       <a:folHlink>
-        <a:srgbClr val="B26B02"/>
+        <a:srgbClr val="BA6906"/>
       </a:folHlink>
     </a:clrScheme>
     <a:fontScheme name="Century Gothic">

--- a/public/Carta de Presentación.pptx
+++ b/public/Carta de Presentación.pptx
@@ -3356,7 +3356,7 @@
             </a:pPr>
             <a:r>
               <a:rPr lang="es-MX" sz="1200" dirty="0">
-                <a:latin typeface="Sitka Small" pitchFamily="2" charset="0"/>
+                <a:latin typeface="Segoe UI Variable Small" pitchFamily="2" charset="0"/>
               </a:rPr>
               <a:t>Pachuca de Soto, Hidalgo, México </a:t>
             </a:r>
@@ -3367,12 +3367,12 @@
             </a:pPr>
             <a:r>
               <a:rPr lang="es-MX" sz="1200" dirty="0">
-                <a:latin typeface="Sitka Small" pitchFamily="2" charset="0"/>
+                <a:latin typeface="Segoe UI Variable Small" pitchFamily="2" charset="0"/>
               </a:rPr>
               <a:t>03 Abril, 2026</a:t>
             </a:r>
             <a:endParaRPr lang="es-MX" sz="1100" dirty="0">
-              <a:latin typeface="Sitka Small" pitchFamily="2" charset="0"/>
+              <a:latin typeface="Segoe UI Variable Small" pitchFamily="2" charset="0"/>
             </a:endParaRPr>
           </a:p>
           <a:p>
@@ -3381,7 +3381,7 @@
             </a:pPr>
             <a:r>
               <a:rPr lang="es-MX" sz="1500" b="1" dirty="0">
-                <a:latin typeface="Sitka Small" pitchFamily="2" charset="0"/>
+                <a:latin typeface="Segoe UI Variable Small" pitchFamily="2" charset="0"/>
               </a:rPr>
               <a:t>CARTA DE PRESENTACIÓN</a:t>
             </a:r>
@@ -3392,7 +3392,7 @@
             </a:pPr>
             <a:r>
               <a:rPr lang="es-MX" sz="1500" b="1" dirty="0">
-                <a:latin typeface="Sitka Small" pitchFamily="2" charset="0"/>
+                <a:latin typeface="Segoe UI Variable Small" pitchFamily="2" charset="0"/>
               </a:rPr>
               <a:t>Departamento de Recursos Humanos</a:t>
             </a:r>
@@ -3402,7 +3402,7 @@
               <a:buNone/>
             </a:pPr>
             <a:endParaRPr lang="es-MX" sz="1500" dirty="0">
-              <a:latin typeface="Sitka Small" pitchFamily="2" charset="0"/>
+              <a:latin typeface="Segoe UI Variable Small" pitchFamily="2" charset="0"/>
             </a:endParaRPr>
           </a:p>
           <a:p>
@@ -3411,12 +3411,12 @@
             </a:pPr>
             <a:r>
               <a:rPr lang="es-MX" sz="1500" b="1" dirty="0">
-                <a:latin typeface="Sitka Small" pitchFamily="2" charset="0"/>
+                <a:latin typeface="Segoe UI Variable Small" pitchFamily="2" charset="0"/>
               </a:rPr>
               <a:t>Estimado equipo de reclutamiento: </a:t>
             </a:r>
             <a:endParaRPr lang="es-MX" sz="1500" dirty="0">
-              <a:latin typeface="Sitka Small" pitchFamily="2" charset="0"/>
+              <a:latin typeface="Segoe UI Variable Small" pitchFamily="2" charset="0"/>
             </a:endParaRPr>
           </a:p>
           <a:p>
@@ -3425,43 +3425,43 @@
             </a:pPr>
             <a:r>
               <a:rPr lang="es-MX" sz="1500" dirty="0">
-                <a:latin typeface="Sitka Small" pitchFamily="2" charset="0"/>
+                <a:latin typeface="Segoe UI Variable Small" pitchFamily="2" charset="0"/>
               </a:rPr>
               <a:t>Soy ingeniero de software con experiencia en el desarrollo integral de aplicaciones web, específicamente en el desarrollo </a:t>
             </a:r>
             <a:r>
               <a:rPr lang="es-MX" sz="1500" dirty="0" err="1">
-                <a:latin typeface="Sitka Small" pitchFamily="2" charset="0"/>
+                <a:latin typeface="Segoe UI Variable Small" pitchFamily="2" charset="0"/>
               </a:rPr>
               <a:t>backend</a:t>
             </a:r>
             <a:r>
               <a:rPr lang="es-MX" sz="1500" dirty="0">
-                <a:latin typeface="Sitka Small" pitchFamily="2" charset="0"/>
+                <a:latin typeface="Segoe UI Variable Small" pitchFamily="2" charset="0"/>
               </a:rPr>
               <a:t> utilizando Java, Spring Boot y SQL. Mi experiencia abarca el desarrollo de API REST, la implementación de lógica de negocio, la integración de bases de datos, la creación de paneles de administración y el trabajo con arquitecturas en capas y el patrón MVC. También disfruto realizar desarrollo </a:t>
             </a:r>
             <a:r>
               <a:rPr lang="es-MX" sz="1500" dirty="0" err="1">
-                <a:latin typeface="Sitka Small" pitchFamily="2" charset="0"/>
+                <a:latin typeface="Segoe UI Variable Small" pitchFamily="2" charset="0"/>
               </a:rPr>
               <a:t>frontend</a:t>
             </a:r>
             <a:r>
               <a:rPr lang="es-MX" sz="1500" dirty="0">
-                <a:latin typeface="Sitka Small" pitchFamily="2" charset="0"/>
+                <a:latin typeface="Segoe UI Variable Small" pitchFamily="2" charset="0"/>
               </a:rPr>
               <a:t> con </a:t>
             </a:r>
             <a:r>
               <a:rPr lang="es-MX" sz="1500" dirty="0" err="1">
-                <a:latin typeface="Sitka Small" pitchFamily="2" charset="0"/>
+                <a:latin typeface="Segoe UI Variable Small" pitchFamily="2" charset="0"/>
               </a:rPr>
               <a:t>React</a:t>
             </a:r>
             <a:r>
               <a:rPr lang="es-MX" sz="1500" dirty="0">
-                <a:latin typeface="Sitka Small" pitchFamily="2" charset="0"/>
+                <a:latin typeface="Segoe UI Variable Small" pitchFamily="2" charset="0"/>
               </a:rPr>
               <a:t>, Angular y Tailwind. </a:t>
             </a:r>
@@ -3472,7 +3472,7 @@
             </a:pPr>
             <a:r>
               <a:rPr lang="es-MX" sz="1500" dirty="0">
-                <a:latin typeface="Sitka Small" pitchFamily="2" charset="0"/>
+                <a:latin typeface="Segoe UI Variable Small" pitchFamily="2" charset="0"/>
               </a:rPr>
               <a:t>He colaborado en proyectos de sectores público, privado y financiero, aplicando buenas prácticas de desarrollo y utilizando Git para el control de versiones y la gestión colaborativa del código.</a:t>
             </a:r>
@@ -3483,31 +3483,31 @@
             </a:pPr>
             <a:r>
               <a:rPr lang="es-MX" sz="1500" dirty="0">
-                <a:latin typeface="Sitka Small" pitchFamily="2" charset="0"/>
+                <a:latin typeface="Segoe UI Variable Small" pitchFamily="2" charset="0"/>
               </a:rPr>
               <a:t>De forma paralela, desarrollo proyectos personales con el objetivo de seguir aprendiendo nuevas tecnologías y fortalecer mis conocimientos en desarrollo de software, arquitectura de aplicaciones y resolución de problemas. Entre ellos destaca “Starlight: No </a:t>
             </a:r>
             <a:r>
               <a:rPr lang="es-MX" sz="1500" dirty="0" err="1">
-                <a:latin typeface="Sitka Small" pitchFamily="2" charset="0"/>
+                <a:latin typeface="Segoe UI Variable Small" pitchFamily="2" charset="0"/>
               </a:rPr>
               <a:t>Return</a:t>
             </a:r>
             <a:r>
               <a:rPr lang="es-MX" sz="1500" dirty="0">
-                <a:latin typeface="Sitka Small" pitchFamily="2" charset="0"/>
+                <a:latin typeface="Segoe UI Variable Small" pitchFamily="2" charset="0"/>
               </a:rPr>
               <a:t>”, un videojuego arcade para navegador desarrollado con JavaScript ES6, </a:t>
             </a:r>
             <a:r>
               <a:rPr lang="es-MX" sz="1500" dirty="0" err="1">
-                <a:latin typeface="Sitka Small" pitchFamily="2" charset="0"/>
+                <a:latin typeface="Segoe UI Variable Small" pitchFamily="2" charset="0"/>
               </a:rPr>
               <a:t>Canvas</a:t>
             </a:r>
             <a:r>
               <a:rPr lang="es-MX" sz="1500" dirty="0">
-                <a:latin typeface="Sitka Small" pitchFamily="2" charset="0"/>
+                <a:latin typeface="Segoe UI Variable Small" pitchFamily="2" charset="0"/>
               </a:rPr>
               <a:t> 2D, CSS3 y Web Audio API.</a:t>
             </a:r>
@@ -3518,7 +3518,7 @@
             </a:pPr>
             <a:r>
               <a:rPr lang="es-MX" sz="1500" dirty="0">
-                <a:latin typeface="Sitka Small" pitchFamily="2" charset="0"/>
+                <a:latin typeface="Segoe UI Variable Small" pitchFamily="2" charset="0"/>
               </a:rPr>
               <a:t>Me considero una persona responsable, creativa y comprometida con el aprendizaje continuo. Disfruto diseñar y desarrollar soluciones con código mantenible, una arquitectura sólida y un enfoque constante en la calidad del software.</a:t>
             </a:r>
@@ -3529,7 +3529,7 @@
             </a:pPr>
             <a:r>
               <a:rPr lang="es-MX" sz="1500" dirty="0">
-                <a:latin typeface="Sitka Small" pitchFamily="2" charset="0"/>
+                <a:latin typeface="Segoe UI Variable Small" pitchFamily="2" charset="0"/>
               </a:rPr>
               <a:t>Agradezco el tiempo dedicado a revisar mi perfil y quedo a su disposición para conversar sobre cómo puedo contribuir al cumplimiento de los objetivos de su organización.</a:t>
             </a:r>
@@ -3539,7 +3539,7 @@
               <a:buNone/>
             </a:pPr>
             <a:endParaRPr lang="es-MX" sz="1500" dirty="0">
-              <a:latin typeface="Sitka Small" pitchFamily="2" charset="0"/>
+              <a:latin typeface="Segoe UI Variable Small" pitchFamily="2" charset="0"/>
             </a:endParaRPr>
           </a:p>
           <a:p>
@@ -3548,7 +3548,7 @@
             </a:pPr>
             <a:r>
               <a:rPr lang="es-MX" sz="1500" dirty="0">
-                <a:latin typeface="Sitka Small" pitchFamily="2" charset="0"/>
+                <a:latin typeface="Segoe UI Variable Small" pitchFamily="2" charset="0"/>
               </a:rPr>
               <a:t>Atentamente,</a:t>
             </a:r>
@@ -3559,16 +3559,25 @@
             </a:pPr>
             <a:r>
               <a:rPr lang="es-MX" sz="1500" b="1" dirty="0">
-                <a:latin typeface="Sitka Small" pitchFamily="2" charset="0"/>
+                <a:latin typeface="Segoe UI Variable Small" pitchFamily="2" charset="0"/>
               </a:rPr>
               <a:t>		</a:t>
             </a:r>
             <a:r>
               <a:rPr lang="es-MX" sz="1500" dirty="0">
-                <a:latin typeface="Sitka Small" pitchFamily="2" charset="0"/>
+                <a:latin typeface="Segoe UI Variable Small" pitchFamily="2" charset="0"/>
               </a:rPr>
-              <a:t>Arturo Juárez Monroy</a:t>
-            </a:r>
+              <a:t>Arturo </a:t>
+            </a:r>
+            <a:r>
+              <a:rPr lang="es-MX" sz="1500">
+                <a:latin typeface="Segoe UI Variable Small" pitchFamily="2" charset="0"/>
+              </a:rPr>
+              <a:t>Juárez Monroy </a:t>
+            </a:r>
+            <a:endParaRPr lang="es-MX" sz="1500" dirty="0">
+              <a:latin typeface="Segoe UI Variable Small" pitchFamily="2" charset="0"/>
+            </a:endParaRPr>
           </a:p>
           <a:p>
             <a:endParaRPr lang="es-MX" dirty="0"/>

--- a/public/Carta de Presentación.pptx
+++ b/public/Carta de Presentación.pptx
@@ -3297,15 +3297,9 @@
   <p:cSld>
     <p:bg>
       <p:bgPr>
-        <a:blipFill dpi="0" rotWithShape="1">
-          <a:blip r:embed="rId2">
-            <a:lum/>
-          </a:blip>
-          <a:srcRect/>
-          <a:stretch>
-            <a:fillRect/>
-          </a:stretch>
-        </a:blipFill>
+        <a:solidFill>
+          <a:srgbClr val="363636"/>
+        </a:solidFill>
         <a:effectLst/>
       </p:bgPr>
     </p:bg>
@@ -3341,8 +3335,8 @@
         </p:nvSpPr>
         <p:spPr>
           <a:xfrm>
-            <a:off x="820133" y="1"/>
-            <a:ext cx="10708848" cy="7001300"/>
+            <a:off x="820133" y="179107"/>
+            <a:ext cx="10708848" cy="6499786"/>
           </a:xfrm>
         </p:spPr>
         <p:txBody>
@@ -3355,7 +3349,7 @@
               <a:buNone/>
             </a:pPr>
             <a:r>
-              <a:rPr lang="es-MX" sz="1200" dirty="0">
+              <a:rPr lang="es-MX" sz="1400" dirty="0">
                 <a:latin typeface="Segoe UI Variable Small" pitchFamily="2" charset="0"/>
               </a:rPr>
               <a:t>Pachuca de Soto, Hidalgo, México </a:t>
@@ -3366,12 +3360,12 @@
               <a:buNone/>
             </a:pPr>
             <a:r>
-              <a:rPr lang="es-MX" sz="1200" dirty="0">
+              <a:rPr lang="es-MX" sz="1400" dirty="0">
                 <a:latin typeface="Segoe UI Variable Small" pitchFamily="2" charset="0"/>
               </a:rPr>
               <a:t>03 Abril, 2026</a:t>
             </a:r>
-            <a:endParaRPr lang="es-MX" sz="1100" dirty="0">
+            <a:endParaRPr lang="es-MX" sz="1200" dirty="0">
               <a:latin typeface="Segoe UI Variable Small" pitchFamily="2" charset="0"/>
             </a:endParaRPr>
           </a:p>
@@ -3380,7 +3374,7 @@
               <a:buNone/>
             </a:pPr>
             <a:r>
-              <a:rPr lang="es-MX" sz="1500" b="1" dirty="0">
+              <a:rPr lang="es-MX" sz="1400" b="1" dirty="0">
                 <a:latin typeface="Segoe UI Variable Small" pitchFamily="2" charset="0"/>
               </a:rPr>
               <a:t>CARTA DE PRESENTACIÓN</a:t>
@@ -3391,7 +3385,7 @@
               <a:buNone/>
             </a:pPr>
             <a:r>
-              <a:rPr lang="es-MX" sz="1500" b="1" dirty="0">
+              <a:rPr lang="es-MX" sz="1400" b="1" dirty="0">
                 <a:latin typeface="Segoe UI Variable Small" pitchFamily="2" charset="0"/>
               </a:rPr>
               <a:t>Departamento de Recursos Humanos</a:t>
@@ -3401,7 +3395,7 @@
             <a:pPr algn="ctr">
               <a:buNone/>
             </a:pPr>
-            <a:endParaRPr lang="es-MX" sz="1500" dirty="0">
+            <a:endParaRPr lang="es-MX" sz="1400" dirty="0">
               <a:latin typeface="Segoe UI Variable Small" pitchFamily="2" charset="0"/>
             </a:endParaRPr>
           </a:p>
@@ -3410,12 +3404,12 @@
               <a:buNone/>
             </a:pPr>
             <a:r>
-              <a:rPr lang="es-MX" sz="1500" b="1" dirty="0">
+              <a:rPr lang="es-MX" sz="1400" b="1" dirty="0">
                 <a:latin typeface="Segoe UI Variable Small" pitchFamily="2" charset="0"/>
               </a:rPr>
               <a:t>Estimado equipo de reclutamiento: </a:t>
             </a:r>
-            <a:endParaRPr lang="es-MX" sz="1500" dirty="0">
+            <a:endParaRPr lang="es-MX" sz="1400" dirty="0">
               <a:latin typeface="Segoe UI Variable Small" pitchFamily="2" charset="0"/>
             </a:endParaRPr>
           </a:p>
@@ -3424,43 +3418,43 @@
               <a:buNone/>
             </a:pPr>
             <a:r>
-              <a:rPr lang="es-MX" sz="1500" dirty="0">
+              <a:rPr lang="es-MX" sz="1400" dirty="0">
                 <a:latin typeface="Segoe UI Variable Small" pitchFamily="2" charset="0"/>
               </a:rPr>
               <a:t>Soy ingeniero de software con experiencia en el desarrollo integral de aplicaciones web, específicamente en el desarrollo </a:t>
             </a:r>
             <a:r>
-              <a:rPr lang="es-MX" sz="1500" dirty="0" err="1">
+              <a:rPr lang="es-MX" sz="1400" dirty="0" err="1">
                 <a:latin typeface="Segoe UI Variable Small" pitchFamily="2" charset="0"/>
               </a:rPr>
               <a:t>backend</a:t>
             </a:r>
             <a:r>
-              <a:rPr lang="es-MX" sz="1500" dirty="0">
+              <a:rPr lang="es-MX" sz="1400" dirty="0">
                 <a:latin typeface="Segoe UI Variable Small" pitchFamily="2" charset="0"/>
               </a:rPr>
               <a:t> utilizando Java, Spring Boot y SQL. Mi experiencia abarca el desarrollo de API REST, la implementación de lógica de negocio, la integración de bases de datos, la creación de paneles de administración y el trabajo con arquitecturas en capas y el patrón MVC. También disfruto realizar desarrollo </a:t>
             </a:r>
             <a:r>
-              <a:rPr lang="es-MX" sz="1500" dirty="0" err="1">
+              <a:rPr lang="es-MX" sz="1400" dirty="0" err="1">
                 <a:latin typeface="Segoe UI Variable Small" pitchFamily="2" charset="0"/>
               </a:rPr>
               <a:t>frontend</a:t>
             </a:r>
             <a:r>
-              <a:rPr lang="es-MX" sz="1500" dirty="0">
+              <a:rPr lang="es-MX" sz="1400" dirty="0">
                 <a:latin typeface="Segoe UI Variable Small" pitchFamily="2" charset="0"/>
               </a:rPr>
               <a:t> con </a:t>
             </a:r>
             <a:r>
-              <a:rPr lang="es-MX" sz="1500" dirty="0" err="1">
+              <a:rPr lang="es-MX" sz="1400" dirty="0" err="1">
                 <a:latin typeface="Segoe UI Variable Small" pitchFamily="2" charset="0"/>
               </a:rPr>
               <a:t>React</a:t>
             </a:r>
             <a:r>
-              <a:rPr lang="es-MX" sz="1500" dirty="0">
+              <a:rPr lang="es-MX" sz="1400" dirty="0">
                 <a:latin typeface="Segoe UI Variable Small" pitchFamily="2" charset="0"/>
               </a:rPr>
               <a:t>, Angular y Tailwind. </a:t>
@@ -3471,7 +3465,7 @@
               <a:buNone/>
             </a:pPr>
             <a:r>
-              <a:rPr lang="es-MX" sz="1500" dirty="0">
+              <a:rPr lang="es-MX" sz="1400" dirty="0">
                 <a:latin typeface="Segoe UI Variable Small" pitchFamily="2" charset="0"/>
               </a:rPr>
               <a:t>He colaborado en proyectos de sectores público, privado y financiero, aplicando buenas prácticas de desarrollo y utilizando Git para el control de versiones y la gestión colaborativa del código.</a:t>
@@ -3482,31 +3476,31 @@
               <a:buNone/>
             </a:pPr>
             <a:r>
-              <a:rPr lang="es-MX" sz="1500" dirty="0">
+              <a:rPr lang="es-MX" sz="1400" dirty="0">
                 <a:latin typeface="Segoe UI Variable Small" pitchFamily="2" charset="0"/>
               </a:rPr>
               <a:t>De forma paralela, desarrollo proyectos personales con el objetivo de seguir aprendiendo nuevas tecnologías y fortalecer mis conocimientos en desarrollo de software, arquitectura de aplicaciones y resolución de problemas. Entre ellos destaca “Starlight: No </a:t>
             </a:r>
             <a:r>
-              <a:rPr lang="es-MX" sz="1500" dirty="0" err="1">
+              <a:rPr lang="es-MX" sz="1400" dirty="0" err="1">
                 <a:latin typeface="Segoe UI Variable Small" pitchFamily="2" charset="0"/>
               </a:rPr>
               <a:t>Return</a:t>
             </a:r>
             <a:r>
-              <a:rPr lang="es-MX" sz="1500" dirty="0">
+              <a:rPr lang="es-MX" sz="1400" dirty="0">
                 <a:latin typeface="Segoe UI Variable Small" pitchFamily="2" charset="0"/>
               </a:rPr>
               <a:t>”, un videojuego arcade para navegador desarrollado con JavaScript ES6, </a:t>
             </a:r>
             <a:r>
-              <a:rPr lang="es-MX" sz="1500" dirty="0" err="1">
+              <a:rPr lang="es-MX" sz="1400" dirty="0" err="1">
                 <a:latin typeface="Segoe UI Variable Small" pitchFamily="2" charset="0"/>
               </a:rPr>
               <a:t>Canvas</a:t>
             </a:r>
             <a:r>
-              <a:rPr lang="es-MX" sz="1500" dirty="0">
+              <a:rPr lang="es-MX" sz="1400" dirty="0">
                 <a:latin typeface="Segoe UI Variable Small" pitchFamily="2" charset="0"/>
               </a:rPr>
               <a:t> 2D, CSS3 y Web Audio API.</a:t>
@@ -3517,7 +3511,7 @@
               <a:buNone/>
             </a:pPr>
             <a:r>
-              <a:rPr lang="es-MX" sz="1500" dirty="0">
+              <a:rPr lang="es-MX" sz="1400" dirty="0">
                 <a:latin typeface="Segoe UI Variable Small" pitchFamily="2" charset="0"/>
               </a:rPr>
               <a:t>Me considero una persona responsable, creativa y comprometida con el aprendizaje continuo. Disfruto diseñar y desarrollar soluciones con código mantenible, una arquitectura sólida y un enfoque constante en la calidad del software.</a:t>
@@ -3528,7 +3522,7 @@
               <a:buNone/>
             </a:pPr>
             <a:r>
-              <a:rPr lang="es-MX" sz="1500" dirty="0">
+              <a:rPr lang="es-MX" sz="1400" dirty="0">
                 <a:latin typeface="Segoe UI Variable Small" pitchFamily="2" charset="0"/>
               </a:rPr>
               <a:t>Agradezco el tiempo dedicado a revisar mi perfil y quedo a su disposición para conversar sobre cómo puedo contribuir al cumplimiento de los objetivos de su organización.</a:t>
@@ -3538,7 +3532,7 @@
             <a:pPr>
               <a:buNone/>
             </a:pPr>
-            <a:endParaRPr lang="es-MX" sz="1500" dirty="0">
+            <a:endParaRPr lang="es-MX" sz="1400" dirty="0">
               <a:latin typeface="Segoe UI Variable Small" pitchFamily="2" charset="0"/>
             </a:endParaRPr>
           </a:p>
@@ -3547,7 +3541,7 @@
               <a:buNone/>
             </a:pPr>
             <a:r>
-              <a:rPr lang="es-MX" sz="1500" dirty="0">
+              <a:rPr lang="es-MX" sz="1400" dirty="0">
                 <a:latin typeface="Segoe UI Variable Small" pitchFamily="2" charset="0"/>
               </a:rPr>
               <a:t>Atentamente,</a:t>
@@ -3558,26 +3552,17 @@
               <a:buNone/>
             </a:pPr>
             <a:r>
-              <a:rPr lang="es-MX" sz="1500" b="1" dirty="0">
+              <a:rPr lang="es-MX" sz="1400" b="1" dirty="0">
                 <a:latin typeface="Segoe UI Variable Small" pitchFamily="2" charset="0"/>
               </a:rPr>
               <a:t>		</a:t>
             </a:r>
             <a:r>
-              <a:rPr lang="es-MX" sz="1500" dirty="0">
+              <a:rPr lang="es-MX" sz="1400" dirty="0">
                 <a:latin typeface="Segoe UI Variable Small" pitchFamily="2" charset="0"/>
               </a:rPr>
-              <a:t>Arturo </a:t>
-            </a:r>
-            <a:r>
-              <a:rPr lang="es-MX" sz="1500">
-                <a:latin typeface="Segoe UI Variable Small" pitchFamily="2" charset="0"/>
-              </a:rPr>
-              <a:t>Juárez Monroy </a:t>
-            </a:r>
-            <a:endParaRPr lang="es-MX" sz="1500" dirty="0">
-              <a:latin typeface="Segoe UI Variable Small" pitchFamily="2" charset="0"/>
-            </a:endParaRPr>
+              <a:t>Arturo Juárez Monroy </a:t>
+            </a:r>
           </a:p>
           <a:p>
             <a:endParaRPr lang="es-MX" dirty="0"/>
@@ -3599,21 +3584,12 @@
           <p:nvPr/>
         </p:nvPicPr>
         <p:blipFill>
-          <a:blip r:embed="rId3">
-            <a:duotone>
-              <a:schemeClr val="bg2">
-                <a:shade val="45000"/>
-                <a:satMod val="135000"/>
-              </a:schemeClr>
-              <a:prstClr val="white"/>
-            </a:duotone>
+          <a:blip r:embed="rId2">
+            <a:grayscl/>
             <a:extLst>
               <a:ext uri="{BEBA8EAE-BF5A-486C-A8C5-ECC9F3942E4B}">
                 <a14:imgProps xmlns:a14="http://schemas.microsoft.com/office/drawing/2010/main">
-                  <a14:imgLayer r:embed="rId4">
-                    <a14:imgEffect>
-                      <a14:sharpenSoften amount="50000"/>
-                    </a14:imgEffect>
+                  <a14:imgLayer r:embed="rId3">
                     <a14:imgEffect>
                       <a14:brightnessContrast contrast="40000"/>
                     </a14:imgEffect>
@@ -3625,14 +3601,12 @@
               </a:ext>
             </a:extLst>
           </a:blip>
-          <a:srcRect t="16168" b="11138"/>
-          <a:stretch>
-            <a:fillRect/>
-          </a:stretch>
+          <a:srcRect l="1079" r="1079"/>
+          <a:stretch/>
         </p:blipFill>
         <p:spPr>
           <a:xfrm>
-            <a:off x="9657421" y="179107"/>
+            <a:off x="9540463" y="179107"/>
             <a:ext cx="1548000" cy="1617379"/>
           </a:xfrm>
           <a:prstGeom prst="ellipse">
@@ -3641,7 +3615,9 @@
           <a:noFill/>
           <a:ln w="12700">
             <a:solidFill>
-              <a:srgbClr val="20625F"/>
+              <a:schemeClr val="tx1">
+                <a:lumMod val="75000"/>
+              </a:schemeClr>
             </a:solidFill>
           </a:ln>
           <a:effectLst>

--- a/public/Carta de Presentación.pptx
+++ b/public/Carta de Presentación.pptx
@@ -275,7 +275,7 @@
           <a:p>
             <a:fld id="{4E370992-1CAB-4810-8415-DC9E05727B44}" type="datetimeFigureOut">
               <a:rPr lang="es-MX" smtClean="0"/>
-              <a:t>28/06/2026</a:t>
+              <a:t>17/07/2026</a:t>
             </a:fld>
             <a:endParaRPr lang="es-MX"/>
           </a:p>
@@ -445,7 +445,7 @@
           <a:p>
             <a:fld id="{4E370992-1CAB-4810-8415-DC9E05727B44}" type="datetimeFigureOut">
               <a:rPr lang="es-MX" smtClean="0"/>
-              <a:t>28/06/2026</a:t>
+              <a:t>17/07/2026</a:t>
             </a:fld>
             <a:endParaRPr lang="es-MX"/>
           </a:p>
@@ -625,7 +625,7 @@
           <a:p>
             <a:fld id="{4E370992-1CAB-4810-8415-DC9E05727B44}" type="datetimeFigureOut">
               <a:rPr lang="es-MX" smtClean="0"/>
-              <a:t>28/06/2026</a:t>
+              <a:t>17/07/2026</a:t>
             </a:fld>
             <a:endParaRPr lang="es-MX"/>
           </a:p>
@@ -795,7 +795,7 @@
           <a:p>
             <a:fld id="{4E370992-1CAB-4810-8415-DC9E05727B44}" type="datetimeFigureOut">
               <a:rPr lang="es-MX" smtClean="0"/>
-              <a:t>28/06/2026</a:t>
+              <a:t>17/07/2026</a:t>
             </a:fld>
             <a:endParaRPr lang="es-MX"/>
           </a:p>
@@ -1063,7 +1063,7 @@
           <a:p>
             <a:fld id="{4E370992-1CAB-4810-8415-DC9E05727B44}" type="datetimeFigureOut">
               <a:rPr lang="es-MX" smtClean="0"/>
-              <a:t>28/06/2026</a:t>
+              <a:t>17/07/2026</a:t>
             </a:fld>
             <a:endParaRPr lang="es-MX"/>
           </a:p>
@@ -1295,7 +1295,7 @@
           <a:p>
             <a:fld id="{4E370992-1CAB-4810-8415-DC9E05727B44}" type="datetimeFigureOut">
               <a:rPr lang="es-MX" smtClean="0"/>
-              <a:t>28/06/2026</a:t>
+              <a:t>17/07/2026</a:t>
             </a:fld>
             <a:endParaRPr lang="es-MX"/>
           </a:p>
@@ -1650,7 +1650,7 @@
           <a:p>
             <a:fld id="{4E370992-1CAB-4810-8415-DC9E05727B44}" type="datetimeFigureOut">
               <a:rPr lang="es-MX" smtClean="0"/>
-              <a:t>28/06/2026</a:t>
+              <a:t>17/07/2026</a:t>
             </a:fld>
             <a:endParaRPr lang="es-MX"/>
           </a:p>
@@ -1791,7 +1791,7 @@
           <a:p>
             <a:fld id="{4E370992-1CAB-4810-8415-DC9E05727B44}" type="datetimeFigureOut">
               <a:rPr lang="es-MX" smtClean="0"/>
-              <a:t>28/06/2026</a:t>
+              <a:t>17/07/2026</a:t>
             </a:fld>
             <a:endParaRPr lang="es-MX"/>
           </a:p>
@@ -1886,7 +1886,7 @@
           <a:p>
             <a:fld id="{4E370992-1CAB-4810-8415-DC9E05727B44}" type="datetimeFigureOut">
               <a:rPr lang="es-MX" smtClean="0"/>
-              <a:t>28/06/2026</a:t>
+              <a:t>17/07/2026</a:t>
             </a:fld>
             <a:endParaRPr lang="es-MX"/>
           </a:p>
@@ -2248,7 +2248,7 @@
           <a:p>
             <a:fld id="{4E370992-1CAB-4810-8415-DC9E05727B44}" type="datetimeFigureOut">
               <a:rPr lang="es-MX" smtClean="0"/>
-              <a:t>28/06/2026</a:t>
+              <a:t>17/07/2026</a:t>
             </a:fld>
             <a:endParaRPr lang="es-MX"/>
           </a:p>
@@ -2610,7 +2610,7 @@
           <a:p>
             <a:fld id="{4E370992-1CAB-4810-8415-DC9E05727B44}" type="datetimeFigureOut">
               <a:rPr lang="es-MX" smtClean="0"/>
-              <a:t>28/06/2026</a:t>
+              <a:t>17/07/2026</a:t>
             </a:fld>
             <a:endParaRPr lang="es-MX"/>
           </a:p>
@@ -2854,7 +2854,7 @@
           <a:p>
             <a:fld id="{4E370992-1CAB-4810-8415-DC9E05727B44}" type="datetimeFigureOut">
               <a:rPr lang="es-MX" smtClean="0"/>
-              <a:t>28/06/2026</a:t>
+              <a:t>17/07/2026</a:t>
             </a:fld>
             <a:endParaRPr lang="es-MX"/>
           </a:p>
@@ -3341,7 +3341,7 @@
         </p:spPr>
         <p:txBody>
           <a:bodyPr>
-            <a:normAutofit lnSpcReduction="10000"/>
+            <a:normAutofit fontScale="92500" lnSpcReduction="20000"/>
           </a:bodyPr>
           <a:lstStyle/>
           <a:p>
@@ -3349,23 +3349,32 @@
               <a:buNone/>
             </a:pPr>
             <a:r>
-              <a:rPr lang="es-MX" sz="1400" dirty="0">
+              <a:rPr lang="es-MX" sz="2000" dirty="0">
                 <a:latin typeface="Segoe UI Variable Small" pitchFamily="2" charset="0"/>
               </a:rPr>
-              <a:t>Pachuca de Soto, Hidalgo, México </a:t>
-            </a:r>
+              <a:t>Pachuca de Soto</a:t>
+            </a:r>
+            <a:r>
+              <a:rPr lang="es-MX" sz="2000">
+                <a:latin typeface="Segoe UI Variable Small" pitchFamily="2" charset="0"/>
+              </a:rPr>
+              <a:t>, Hidalgo.</a:t>
+            </a:r>
+            <a:endParaRPr lang="es-MX" sz="2000" dirty="0">
+              <a:latin typeface="Segoe UI Variable Small" pitchFamily="2" charset="0"/>
+            </a:endParaRPr>
           </a:p>
           <a:p>
             <a:pPr>
               <a:buNone/>
             </a:pPr>
             <a:r>
-              <a:rPr lang="es-MX" sz="1400" dirty="0">
+              <a:rPr lang="es-MX" sz="2000" dirty="0">
                 <a:latin typeface="Segoe UI Variable Small" pitchFamily="2" charset="0"/>
               </a:rPr>
               <a:t>03 Abril, 2026</a:t>
             </a:r>
-            <a:endParaRPr lang="es-MX" sz="1200" dirty="0">
+            <a:endParaRPr lang="es-MX" dirty="0">
               <a:latin typeface="Segoe UI Variable Small" pitchFamily="2" charset="0"/>
             </a:endParaRPr>
           </a:p>
@@ -3374,7 +3383,7 @@
               <a:buNone/>
             </a:pPr>
             <a:r>
-              <a:rPr lang="es-MX" sz="1400" b="1" dirty="0">
+              <a:rPr lang="es-MX" sz="2000" b="1" dirty="0">
                 <a:latin typeface="Segoe UI Variable Small" pitchFamily="2" charset="0"/>
               </a:rPr>
               <a:t>CARTA DE PRESENTACIÓN</a:t>
@@ -3385,7 +3394,7 @@
               <a:buNone/>
             </a:pPr>
             <a:r>
-              <a:rPr lang="es-MX" sz="1400" b="1" dirty="0">
+              <a:rPr lang="es-MX" sz="2000" b="1" dirty="0">
                 <a:latin typeface="Segoe UI Variable Small" pitchFamily="2" charset="0"/>
               </a:rPr>
               <a:t>Departamento de Recursos Humanos</a:t>
@@ -3395,7 +3404,7 @@
             <a:pPr algn="ctr">
               <a:buNone/>
             </a:pPr>
-            <a:endParaRPr lang="es-MX" sz="1400" dirty="0">
+            <a:endParaRPr lang="es-MX" sz="2000" dirty="0">
               <a:latin typeface="Segoe UI Variable Small" pitchFamily="2" charset="0"/>
             </a:endParaRPr>
           </a:p>
@@ -3404,12 +3413,12 @@
               <a:buNone/>
             </a:pPr>
             <a:r>
-              <a:rPr lang="es-MX" sz="1400" b="1" dirty="0">
+              <a:rPr lang="es-MX" sz="2000" b="1" dirty="0">
                 <a:latin typeface="Segoe UI Variable Small" pitchFamily="2" charset="0"/>
               </a:rPr>
               <a:t>Estimado equipo de reclutamiento: </a:t>
             </a:r>
-            <a:endParaRPr lang="es-MX" sz="1400" dirty="0">
+            <a:endParaRPr lang="es-MX" sz="2000" dirty="0">
               <a:latin typeface="Segoe UI Variable Small" pitchFamily="2" charset="0"/>
             </a:endParaRPr>
           </a:p>
@@ -3418,43 +3427,43 @@
               <a:buNone/>
             </a:pPr>
             <a:r>
-              <a:rPr lang="es-MX" sz="1400" dirty="0">
+              <a:rPr lang="es-MX" sz="2000" dirty="0">
                 <a:latin typeface="Segoe UI Variable Small" pitchFamily="2" charset="0"/>
               </a:rPr>
               <a:t>Soy ingeniero de software con experiencia en el desarrollo integral de aplicaciones web, específicamente en el desarrollo </a:t>
             </a:r>
             <a:r>
-              <a:rPr lang="es-MX" sz="1400" dirty="0" err="1">
+              <a:rPr lang="es-MX" sz="2000" dirty="0" err="1">
                 <a:latin typeface="Segoe UI Variable Small" pitchFamily="2" charset="0"/>
               </a:rPr>
               <a:t>backend</a:t>
             </a:r>
             <a:r>
-              <a:rPr lang="es-MX" sz="1400" dirty="0">
+              <a:rPr lang="es-MX" sz="2000" dirty="0">
                 <a:latin typeface="Segoe UI Variable Small" pitchFamily="2" charset="0"/>
               </a:rPr>
               <a:t> utilizando Java, Spring Boot y SQL. Mi experiencia abarca el desarrollo de API REST, la implementación de lógica de negocio, la integración de bases de datos, la creación de paneles de administración y el trabajo con arquitecturas en capas y el patrón MVC. También disfruto realizar desarrollo </a:t>
             </a:r>
             <a:r>
-              <a:rPr lang="es-MX" sz="1400" dirty="0" err="1">
+              <a:rPr lang="es-MX" sz="2000" dirty="0" err="1">
                 <a:latin typeface="Segoe UI Variable Small" pitchFamily="2" charset="0"/>
               </a:rPr>
               <a:t>frontend</a:t>
             </a:r>
             <a:r>
-              <a:rPr lang="es-MX" sz="1400" dirty="0">
+              <a:rPr lang="es-MX" sz="2000" dirty="0">
                 <a:latin typeface="Segoe UI Variable Small" pitchFamily="2" charset="0"/>
               </a:rPr>
               <a:t> con </a:t>
             </a:r>
             <a:r>
-              <a:rPr lang="es-MX" sz="1400" dirty="0" err="1">
+              <a:rPr lang="es-MX" sz="2000" dirty="0" err="1">
                 <a:latin typeface="Segoe UI Variable Small" pitchFamily="2" charset="0"/>
               </a:rPr>
               <a:t>React</a:t>
             </a:r>
             <a:r>
-              <a:rPr lang="es-MX" sz="1400" dirty="0">
+              <a:rPr lang="es-MX" sz="2000" dirty="0">
                 <a:latin typeface="Segoe UI Variable Small" pitchFamily="2" charset="0"/>
               </a:rPr>
               <a:t>, Angular y Tailwind. </a:t>
@@ -3465,53 +3474,7 @@
               <a:buNone/>
             </a:pPr>
             <a:r>
-              <a:rPr lang="es-MX" sz="1400" dirty="0">
-                <a:latin typeface="Segoe UI Variable Small" pitchFamily="2" charset="0"/>
-              </a:rPr>
-              <a:t>He colaborado en proyectos de sectores público, privado y financiero, aplicando buenas prácticas de desarrollo y utilizando Git para el control de versiones y la gestión colaborativa del código.</a:t>
-            </a:r>
-          </a:p>
-          <a:p>
-            <a:pPr>
-              <a:buNone/>
-            </a:pPr>
-            <a:r>
-              <a:rPr lang="es-MX" sz="1400" dirty="0">
-                <a:latin typeface="Segoe UI Variable Small" pitchFamily="2" charset="0"/>
-              </a:rPr>
-              <a:t>De forma paralela, desarrollo proyectos personales con el objetivo de seguir aprendiendo nuevas tecnologías y fortalecer mis conocimientos en desarrollo de software, arquitectura de aplicaciones y resolución de problemas. Entre ellos destaca “Starlight: No </a:t>
-            </a:r>
-            <a:r>
-              <a:rPr lang="es-MX" sz="1400" dirty="0" err="1">
-                <a:latin typeface="Segoe UI Variable Small" pitchFamily="2" charset="0"/>
-              </a:rPr>
-              <a:t>Return</a:t>
-            </a:r>
-            <a:r>
-              <a:rPr lang="es-MX" sz="1400" dirty="0">
-                <a:latin typeface="Segoe UI Variable Small" pitchFamily="2" charset="0"/>
-              </a:rPr>
-              <a:t>”, un videojuego arcade para navegador desarrollado con JavaScript ES6, </a:t>
-            </a:r>
-            <a:r>
-              <a:rPr lang="es-MX" sz="1400" dirty="0" err="1">
-                <a:latin typeface="Segoe UI Variable Small" pitchFamily="2" charset="0"/>
-              </a:rPr>
-              <a:t>Canvas</a:t>
-            </a:r>
-            <a:r>
-              <a:rPr lang="es-MX" sz="1400" dirty="0">
-                <a:latin typeface="Segoe UI Variable Small" pitchFamily="2" charset="0"/>
-              </a:rPr>
-              <a:t> 2D, CSS3 y Web Audio API.</a:t>
-            </a:r>
-          </a:p>
-          <a:p>
-            <a:pPr>
-              <a:buNone/>
-            </a:pPr>
-            <a:r>
-              <a:rPr lang="es-MX" sz="1400" dirty="0">
+              <a:rPr lang="es-MX" sz="2000" dirty="0">
                 <a:latin typeface="Segoe UI Variable Small" pitchFamily="2" charset="0"/>
               </a:rPr>
               <a:t>Me considero una persona responsable, creativa y comprometida con el aprendizaje continuo. Disfruto diseñar y desarrollar soluciones con código mantenible, una arquitectura sólida y un enfoque constante en la calidad del software.</a:t>
@@ -3522,7 +3485,7 @@
               <a:buNone/>
             </a:pPr>
             <a:r>
-              <a:rPr lang="es-MX" sz="1400" dirty="0">
+              <a:rPr lang="es-MX" sz="2000" dirty="0">
                 <a:latin typeface="Segoe UI Variable Small" pitchFamily="2" charset="0"/>
               </a:rPr>
               <a:t>Agradezco el tiempo dedicado a revisar mi perfil y quedo a su disposición para conversar sobre cómo puedo contribuir al cumplimiento de los objetivos de su organización.</a:t>
@@ -3532,7 +3495,7 @@
             <a:pPr>
               <a:buNone/>
             </a:pPr>
-            <a:endParaRPr lang="es-MX" sz="1400" dirty="0">
+            <a:endParaRPr lang="es-MX" sz="2000" dirty="0">
               <a:latin typeface="Segoe UI Variable Small" pitchFamily="2" charset="0"/>
             </a:endParaRPr>
           </a:p>
@@ -3541,7 +3504,7 @@
               <a:buNone/>
             </a:pPr>
             <a:r>
-              <a:rPr lang="es-MX" sz="1400" dirty="0">
+              <a:rPr lang="es-MX" sz="2000" dirty="0">
                 <a:latin typeface="Segoe UI Variable Small" pitchFamily="2" charset="0"/>
               </a:rPr>
               <a:t>Atentamente,</a:t>
@@ -3552,13 +3515,13 @@
               <a:buNone/>
             </a:pPr>
             <a:r>
-              <a:rPr lang="es-MX" sz="1400" b="1" dirty="0">
+              <a:rPr lang="es-MX" sz="2000" b="1" dirty="0">
                 <a:latin typeface="Segoe UI Variable Small" pitchFamily="2" charset="0"/>
               </a:rPr>
               <a:t>		</a:t>
             </a:r>
             <a:r>
-              <a:rPr lang="es-MX" sz="1400" dirty="0">
+              <a:rPr lang="es-MX" sz="2000" dirty="0">
                 <a:latin typeface="Segoe UI Variable Small" pitchFamily="2" charset="0"/>
               </a:rPr>
               <a:t>Arturo Juárez Monroy </a:t>

--- a/public/Carta de Presentación.pptx
+++ b/public/Carta de Presentación.pptx
@@ -3298,7 +3298,7 @@
     <p:bg>
       <p:bgPr>
         <a:solidFill>
-          <a:srgbClr val="363636"/>
+          <a:schemeClr val="tx1"/>
         </a:solidFill>
         <a:effectLst/>
       </p:bgPr>
@@ -3350,19 +3350,13 @@
             </a:pPr>
             <a:r>
               <a:rPr lang="es-MX" sz="2000" dirty="0">
+                <a:solidFill>
+                  <a:srgbClr val="383838"/>
+                </a:solidFill>
                 <a:latin typeface="Segoe UI Variable Small" pitchFamily="2" charset="0"/>
               </a:rPr>
-              <a:t>Pachuca de Soto</a:t>
-            </a:r>
-            <a:r>
-              <a:rPr lang="es-MX" sz="2000">
-                <a:latin typeface="Segoe UI Variable Small" pitchFamily="2" charset="0"/>
-              </a:rPr>
-              <a:t>, Hidalgo.</a:t>
-            </a:r>
-            <a:endParaRPr lang="es-MX" sz="2000" dirty="0">
-              <a:latin typeface="Segoe UI Variable Small" pitchFamily="2" charset="0"/>
-            </a:endParaRPr>
+              <a:t>Pachuca de Soto, Hidalgo.</a:t>
+            </a:r>
           </a:p>
           <a:p>
             <a:pPr>
@@ -3370,11 +3364,17 @@
             </a:pPr>
             <a:r>
               <a:rPr lang="es-MX" sz="2000" dirty="0">
+                <a:solidFill>
+                  <a:srgbClr val="383838"/>
+                </a:solidFill>
                 <a:latin typeface="Segoe UI Variable Small" pitchFamily="2" charset="0"/>
               </a:rPr>
               <a:t>03 Abril, 2026</a:t>
             </a:r>
             <a:endParaRPr lang="es-MX" dirty="0">
+              <a:solidFill>
+                <a:srgbClr val="383838"/>
+              </a:solidFill>
               <a:latin typeface="Segoe UI Variable Small" pitchFamily="2" charset="0"/>
             </a:endParaRPr>
           </a:p>
@@ -3384,6 +3384,9 @@
             </a:pPr>
             <a:r>
               <a:rPr lang="es-MX" sz="2000" b="1" dirty="0">
+                <a:solidFill>
+                  <a:srgbClr val="383838"/>
+                </a:solidFill>
                 <a:latin typeface="Segoe UI Variable Small" pitchFamily="2" charset="0"/>
               </a:rPr>
               <a:t>CARTA DE PRESENTACIÓN</a:t>
@@ -3395,6 +3398,9 @@
             </a:pPr>
             <a:r>
               <a:rPr lang="es-MX" sz="2000" b="1" dirty="0">
+                <a:solidFill>
+                  <a:srgbClr val="383838"/>
+                </a:solidFill>
                 <a:latin typeface="Segoe UI Variable Small" pitchFamily="2" charset="0"/>
               </a:rPr>
               <a:t>Departamento de Recursos Humanos</a:t>
@@ -3405,6 +3411,9 @@
               <a:buNone/>
             </a:pPr>
             <a:endParaRPr lang="es-MX" sz="2000" dirty="0">
+              <a:solidFill>
+                <a:srgbClr val="383838"/>
+              </a:solidFill>
               <a:latin typeface="Segoe UI Variable Small" pitchFamily="2" charset="0"/>
             </a:endParaRPr>
           </a:p>
@@ -3414,11 +3423,17 @@
             </a:pPr>
             <a:r>
               <a:rPr lang="es-MX" sz="2000" b="1" dirty="0">
+                <a:solidFill>
+                  <a:srgbClr val="383838"/>
+                </a:solidFill>
                 <a:latin typeface="Segoe UI Variable Small" pitchFamily="2" charset="0"/>
               </a:rPr>
               <a:t>Estimado equipo de reclutamiento: </a:t>
             </a:r>
             <a:endParaRPr lang="es-MX" sz="2000" dirty="0">
+              <a:solidFill>
+                <a:srgbClr val="383838"/>
+              </a:solidFill>
               <a:latin typeface="Segoe UI Variable Small" pitchFamily="2" charset="0"/>
             </a:endParaRPr>
           </a:p>
@@ -3428,42 +3443,63 @@
             </a:pPr>
             <a:r>
               <a:rPr lang="es-MX" sz="2000" dirty="0">
+                <a:solidFill>
+                  <a:srgbClr val="383838"/>
+                </a:solidFill>
                 <a:latin typeface="Segoe UI Variable Small" pitchFamily="2" charset="0"/>
               </a:rPr>
               <a:t>Soy ingeniero de software con experiencia en el desarrollo integral de aplicaciones web, específicamente en el desarrollo </a:t>
             </a:r>
             <a:r>
               <a:rPr lang="es-MX" sz="2000" dirty="0" err="1">
+                <a:solidFill>
+                  <a:srgbClr val="383838"/>
+                </a:solidFill>
                 <a:latin typeface="Segoe UI Variable Small" pitchFamily="2" charset="0"/>
               </a:rPr>
               <a:t>backend</a:t>
             </a:r>
             <a:r>
               <a:rPr lang="es-MX" sz="2000" dirty="0">
+                <a:solidFill>
+                  <a:srgbClr val="383838"/>
+                </a:solidFill>
                 <a:latin typeface="Segoe UI Variable Small" pitchFamily="2" charset="0"/>
               </a:rPr>
               <a:t> utilizando Java, Spring Boot y SQL. Mi experiencia abarca el desarrollo de API REST, la implementación de lógica de negocio, la integración de bases de datos, la creación de paneles de administración y el trabajo con arquitecturas en capas y el patrón MVC. También disfruto realizar desarrollo </a:t>
             </a:r>
             <a:r>
               <a:rPr lang="es-MX" sz="2000" dirty="0" err="1">
+                <a:solidFill>
+                  <a:srgbClr val="383838"/>
+                </a:solidFill>
                 <a:latin typeface="Segoe UI Variable Small" pitchFamily="2" charset="0"/>
               </a:rPr>
               <a:t>frontend</a:t>
             </a:r>
             <a:r>
               <a:rPr lang="es-MX" sz="2000" dirty="0">
+                <a:solidFill>
+                  <a:srgbClr val="383838"/>
+                </a:solidFill>
                 <a:latin typeface="Segoe UI Variable Small" pitchFamily="2" charset="0"/>
               </a:rPr>
               <a:t> con </a:t>
             </a:r>
             <a:r>
               <a:rPr lang="es-MX" sz="2000" dirty="0" err="1">
+                <a:solidFill>
+                  <a:srgbClr val="383838"/>
+                </a:solidFill>
                 <a:latin typeface="Segoe UI Variable Small" pitchFamily="2" charset="0"/>
               </a:rPr>
               <a:t>React</a:t>
             </a:r>
             <a:r>
               <a:rPr lang="es-MX" sz="2000" dirty="0">
+                <a:solidFill>
+                  <a:srgbClr val="383838"/>
+                </a:solidFill>
                 <a:latin typeface="Segoe UI Variable Small" pitchFamily="2" charset="0"/>
               </a:rPr>
               <a:t>, Angular y Tailwind. </a:t>
@@ -3475,6 +3511,9 @@
             </a:pPr>
             <a:r>
               <a:rPr lang="es-MX" sz="2000" dirty="0">
+                <a:solidFill>
+                  <a:srgbClr val="383838"/>
+                </a:solidFill>
                 <a:latin typeface="Segoe UI Variable Small" pitchFamily="2" charset="0"/>
               </a:rPr>
               <a:t>Me considero una persona responsable, creativa y comprometida con el aprendizaje continuo. Disfruto diseñar y desarrollar soluciones con código mantenible, una arquitectura sólida y un enfoque constante en la calidad del software.</a:t>
@@ -3486,6 +3525,9 @@
             </a:pPr>
             <a:r>
               <a:rPr lang="es-MX" sz="2000" dirty="0">
+                <a:solidFill>
+                  <a:srgbClr val="383838"/>
+                </a:solidFill>
                 <a:latin typeface="Segoe UI Variable Small" pitchFamily="2" charset="0"/>
               </a:rPr>
               <a:t>Agradezco el tiempo dedicado a revisar mi perfil y quedo a su disposición para conversar sobre cómo puedo contribuir al cumplimiento de los objetivos de su organización.</a:t>
@@ -3496,6 +3538,9 @@
               <a:buNone/>
             </a:pPr>
             <a:endParaRPr lang="es-MX" sz="2000" dirty="0">
+              <a:solidFill>
+                <a:srgbClr val="383838"/>
+              </a:solidFill>
               <a:latin typeface="Segoe UI Variable Small" pitchFamily="2" charset="0"/>
             </a:endParaRPr>
           </a:p>
@@ -3505,6 +3550,9 @@
             </a:pPr>
             <a:r>
               <a:rPr lang="es-MX" sz="2000" dirty="0">
+                <a:solidFill>
+                  <a:srgbClr val="383838"/>
+                </a:solidFill>
                 <a:latin typeface="Segoe UI Variable Small" pitchFamily="2" charset="0"/>
               </a:rPr>
               <a:t>Atentamente,</a:t>
@@ -3516,82 +3564,32 @@
             </a:pPr>
             <a:r>
               <a:rPr lang="es-MX" sz="2000" b="1" dirty="0">
+                <a:solidFill>
+                  <a:srgbClr val="383838"/>
+                </a:solidFill>
                 <a:latin typeface="Segoe UI Variable Small" pitchFamily="2" charset="0"/>
               </a:rPr>
               <a:t>		</a:t>
             </a:r>
             <a:r>
               <a:rPr lang="es-MX" sz="2000" dirty="0">
+                <a:solidFill>
+                  <a:srgbClr val="383838"/>
+                </a:solidFill>
                 <a:latin typeface="Segoe UI Variable Small" pitchFamily="2" charset="0"/>
               </a:rPr>
               <a:t>Arturo Juárez Monroy </a:t>
             </a:r>
           </a:p>
           <a:p>
-            <a:endParaRPr lang="es-MX" dirty="0"/>
-          </a:p>
-        </p:txBody>
-      </p:sp>
-      <p:pic>
-        <p:nvPicPr>
-          <p:cNvPr id="7" name="Imagen 6">
-            <a:extLst>
-              <a:ext uri="{FF2B5EF4-FFF2-40B4-BE49-F238E27FC236}">
-                <a16:creationId xmlns:a16="http://schemas.microsoft.com/office/drawing/2014/main" id="{24FCD3D8-DDA9-BB7C-7593-A9B1FD67868D}"/>
-              </a:ext>
-            </a:extLst>
-          </p:cNvPr>
-          <p:cNvPicPr>
-            <a:picLocks noChangeAspect="1"/>
-          </p:cNvPicPr>
-          <p:nvPr/>
-        </p:nvPicPr>
-        <p:blipFill>
-          <a:blip r:embed="rId2">
-            <a:grayscl/>
-            <a:extLst>
-              <a:ext uri="{BEBA8EAE-BF5A-486C-A8C5-ECC9F3942E4B}">
-                <a14:imgProps xmlns:a14="http://schemas.microsoft.com/office/drawing/2010/main">
-                  <a14:imgLayer r:embed="rId3">
-                    <a14:imgEffect>
-                      <a14:brightnessContrast contrast="40000"/>
-                    </a14:imgEffect>
-                  </a14:imgLayer>
-                </a14:imgProps>
-              </a:ext>
-              <a:ext uri="{28A0092B-C50C-407E-A947-70E740481C1C}">
-                <a14:useLocalDpi xmlns:a14="http://schemas.microsoft.com/office/drawing/2010/main" val="0"/>
-              </a:ext>
-            </a:extLst>
-          </a:blip>
-          <a:srcRect l="1079" r="1079"/>
-          <a:stretch/>
-        </p:blipFill>
-        <p:spPr>
-          <a:xfrm>
-            <a:off x="9540463" y="179107"/>
-            <a:ext cx="1548000" cy="1617379"/>
-          </a:xfrm>
-          <a:prstGeom prst="ellipse">
-            <a:avLst/>
-          </a:prstGeom>
-          <a:noFill/>
-          <a:ln w="12700">
-            <a:solidFill>
-              <a:schemeClr val="tx1">
-                <a:lumMod val="75000"/>
-              </a:schemeClr>
-            </a:solidFill>
-          </a:ln>
-          <a:effectLst>
-            <a:outerShdw blurRad="76200" dir="18900000" sy="23000" kx="-1200000" algn="bl" rotWithShape="0">
-              <a:prstClr val="black">
-                <a:alpha val="20000"/>
-              </a:prstClr>
-            </a:outerShdw>
-          </a:effectLst>
-        </p:spPr>
-      </p:pic>
+            <a:endParaRPr lang="es-MX" dirty="0">
+              <a:solidFill>
+                <a:srgbClr val="383838"/>
+              </a:solidFill>
+            </a:endParaRPr>
+          </a:p>
+        </p:txBody>
+      </p:sp>
     </p:spTree>
     <p:extLst>
       <p:ext uri="{BB962C8B-B14F-4D97-AF65-F5344CB8AC3E}">

--- a/public/Carta de Presentación.pptx
+++ b/public/Carta de Presentación.pptx
@@ -3351,7 +3351,7 @@
             <a:r>
               <a:rPr lang="es-MX" sz="2000" dirty="0">
                 <a:solidFill>
-                  <a:srgbClr val="383838"/>
+                  <a:srgbClr val="585858"/>
                 </a:solidFill>
                 <a:latin typeface="Segoe UI Variable Small" pitchFamily="2" charset="0"/>
               </a:rPr>
@@ -3365,7 +3365,7 @@
             <a:r>
               <a:rPr lang="es-MX" sz="2000" dirty="0">
                 <a:solidFill>
-                  <a:srgbClr val="383838"/>
+                  <a:srgbClr val="585858"/>
                 </a:solidFill>
                 <a:latin typeface="Segoe UI Variable Small" pitchFamily="2" charset="0"/>
               </a:rPr>
@@ -3373,7 +3373,7 @@
             </a:r>
             <a:endParaRPr lang="es-MX" dirty="0">
               <a:solidFill>
-                <a:srgbClr val="383838"/>
+                <a:srgbClr val="585858"/>
               </a:solidFill>
               <a:latin typeface="Segoe UI Variable Small" pitchFamily="2" charset="0"/>
             </a:endParaRPr>
@@ -3385,7 +3385,7 @@
             <a:r>
               <a:rPr lang="es-MX" sz="2000" b="1" dirty="0">
                 <a:solidFill>
-                  <a:srgbClr val="383838"/>
+                  <a:srgbClr val="585858"/>
                 </a:solidFill>
                 <a:latin typeface="Segoe UI Variable Small" pitchFamily="2" charset="0"/>
               </a:rPr>
@@ -3399,7 +3399,7 @@
             <a:r>
               <a:rPr lang="es-MX" sz="2000" b="1" dirty="0">
                 <a:solidFill>
-                  <a:srgbClr val="383838"/>
+                  <a:srgbClr val="585858"/>
                 </a:solidFill>
                 <a:latin typeface="Segoe UI Variable Small" pitchFamily="2" charset="0"/>
               </a:rPr>
@@ -3412,7 +3412,7 @@
             </a:pPr>
             <a:endParaRPr lang="es-MX" sz="2000" dirty="0">
               <a:solidFill>
-                <a:srgbClr val="383838"/>
+                <a:srgbClr val="585858"/>
               </a:solidFill>
               <a:latin typeface="Segoe UI Variable Small" pitchFamily="2" charset="0"/>
             </a:endParaRPr>
@@ -3424,7 +3424,7 @@
             <a:r>
               <a:rPr lang="es-MX" sz="2000" b="1" dirty="0">
                 <a:solidFill>
-                  <a:srgbClr val="383838"/>
+                  <a:srgbClr val="585858"/>
                 </a:solidFill>
                 <a:latin typeface="Segoe UI Variable Small" pitchFamily="2" charset="0"/>
               </a:rPr>
@@ -3432,7 +3432,7 @@
             </a:r>
             <a:endParaRPr lang="es-MX" sz="2000" dirty="0">
               <a:solidFill>
-                <a:srgbClr val="383838"/>
+                <a:srgbClr val="585858"/>
               </a:solidFill>
               <a:latin typeface="Segoe UI Variable Small" pitchFamily="2" charset="0"/>
             </a:endParaRPr>
@@ -3444,7 +3444,7 @@
             <a:r>
               <a:rPr lang="es-MX" sz="2000" dirty="0">
                 <a:solidFill>
-                  <a:srgbClr val="383838"/>
+                  <a:srgbClr val="585858"/>
                 </a:solidFill>
                 <a:latin typeface="Segoe UI Variable Small" pitchFamily="2" charset="0"/>
               </a:rPr>
@@ -3453,7 +3453,7 @@
             <a:r>
               <a:rPr lang="es-MX" sz="2000" dirty="0" err="1">
                 <a:solidFill>
-                  <a:srgbClr val="383838"/>
+                  <a:srgbClr val="585858"/>
                 </a:solidFill>
                 <a:latin typeface="Segoe UI Variable Small" pitchFamily="2" charset="0"/>
               </a:rPr>
@@ -3462,7 +3462,7 @@
             <a:r>
               <a:rPr lang="es-MX" sz="2000" dirty="0">
                 <a:solidFill>
-                  <a:srgbClr val="383838"/>
+                  <a:srgbClr val="585858"/>
                 </a:solidFill>
                 <a:latin typeface="Segoe UI Variable Small" pitchFamily="2" charset="0"/>
               </a:rPr>
@@ -3471,7 +3471,7 @@
             <a:r>
               <a:rPr lang="es-MX" sz="2000" dirty="0" err="1">
                 <a:solidFill>
-                  <a:srgbClr val="383838"/>
+                  <a:srgbClr val="585858"/>
                 </a:solidFill>
                 <a:latin typeface="Segoe UI Variable Small" pitchFamily="2" charset="0"/>
               </a:rPr>
@@ -3480,7 +3480,7 @@
             <a:r>
               <a:rPr lang="es-MX" sz="2000" dirty="0">
                 <a:solidFill>
-                  <a:srgbClr val="383838"/>
+                  <a:srgbClr val="585858"/>
                 </a:solidFill>
                 <a:latin typeface="Segoe UI Variable Small" pitchFamily="2" charset="0"/>
               </a:rPr>
@@ -3489,7 +3489,7 @@
             <a:r>
               <a:rPr lang="es-MX" sz="2000" dirty="0" err="1">
                 <a:solidFill>
-                  <a:srgbClr val="383838"/>
+                  <a:srgbClr val="585858"/>
                 </a:solidFill>
                 <a:latin typeface="Segoe UI Variable Small" pitchFamily="2" charset="0"/>
               </a:rPr>
@@ -3498,7 +3498,7 @@
             <a:r>
               <a:rPr lang="es-MX" sz="2000" dirty="0">
                 <a:solidFill>
-                  <a:srgbClr val="383838"/>
+                  <a:srgbClr val="585858"/>
                 </a:solidFill>
                 <a:latin typeface="Segoe UI Variable Small" pitchFamily="2" charset="0"/>
               </a:rPr>
@@ -3512,7 +3512,7 @@
             <a:r>
               <a:rPr lang="es-MX" sz="2000" dirty="0">
                 <a:solidFill>
-                  <a:srgbClr val="383838"/>
+                  <a:srgbClr val="585858"/>
                 </a:solidFill>
                 <a:latin typeface="Segoe UI Variable Small" pitchFamily="2" charset="0"/>
               </a:rPr>
@@ -3526,7 +3526,7 @@
             <a:r>
               <a:rPr lang="es-MX" sz="2000" dirty="0">
                 <a:solidFill>
-                  <a:srgbClr val="383838"/>
+                  <a:srgbClr val="585858"/>
                 </a:solidFill>
                 <a:latin typeface="Segoe UI Variable Small" pitchFamily="2" charset="0"/>
               </a:rPr>
@@ -3539,7 +3539,7 @@
             </a:pPr>
             <a:endParaRPr lang="es-MX" sz="2000" dirty="0">
               <a:solidFill>
-                <a:srgbClr val="383838"/>
+                <a:srgbClr val="585858"/>
               </a:solidFill>
               <a:latin typeface="Segoe UI Variable Small" pitchFamily="2" charset="0"/>
             </a:endParaRPr>
@@ -3549,14 +3549,20 @@
               <a:buNone/>
             </a:pPr>
             <a:r>
-              <a:rPr lang="es-MX" sz="2000" dirty="0">
-                <a:solidFill>
-                  <a:srgbClr val="383838"/>
+              <a:rPr lang="es-MX" sz="2000">
+                <a:solidFill>
+                  <a:srgbClr val="585858"/>
                 </a:solidFill>
                 <a:latin typeface="Segoe UI Variable Small" pitchFamily="2" charset="0"/>
               </a:rPr>
-              <a:t>Atentamente,</a:t>
-            </a:r>
+              <a:t>Atentamente,   </a:t>
+            </a:r>
+            <a:endParaRPr lang="es-MX" sz="2000" dirty="0">
+              <a:solidFill>
+                <a:srgbClr val="585858"/>
+              </a:solidFill>
+              <a:latin typeface="Segoe UI Variable Small" pitchFamily="2" charset="0"/>
+            </a:endParaRPr>
           </a:p>
           <a:p>
             <a:pPr>
@@ -3565,7 +3571,7 @@
             <a:r>
               <a:rPr lang="es-MX" sz="2000" b="1" dirty="0">
                 <a:solidFill>
-                  <a:srgbClr val="383838"/>
+                  <a:srgbClr val="585858"/>
                 </a:solidFill>
                 <a:latin typeface="Segoe UI Variable Small" pitchFamily="2" charset="0"/>
               </a:rPr>
@@ -3574,7 +3580,7 @@
             <a:r>
               <a:rPr lang="es-MX" sz="2000" dirty="0">
                 <a:solidFill>
-                  <a:srgbClr val="383838"/>
+                  <a:srgbClr val="585858"/>
                 </a:solidFill>
                 <a:latin typeface="Segoe UI Variable Small" pitchFamily="2" charset="0"/>
               </a:rPr>
